--- a/01-dars - Kompyuter tuzilishi, tashqi va ichki qurilmalar/01-dars - Slayd.pptx
+++ b/01-dars - Kompyuter tuzilishi, tashqi va ichki qurilmalar/01-dars - Slayd.pptx
@@ -11,10 +11,9 @@
     <p:sldId id="259" r:id="rId5"/>
     <p:sldId id="260" r:id="rId6"/>
     <p:sldId id="261" r:id="rId7"/>
-    <p:sldId id="262" r:id="rId8"/>
   </p:sldIdLst>
   <p:notesMasterIdLst>
-    <p:notesMasterId r:id="rId9"/>
+    <p:notesMasterId r:id="rId8"/>
   </p:notesMasterIdLst>
   <p:sldSz cx="12191695" cy="6858000"/>
   <p:notesSz cx="6858000" cy="12191695"/>
@@ -990,94 +989,6 @@
 </p:notes>
 </file>
 
-<file path=ppt/notesSlides/notesSlide7.xml><?xml version="1.0" encoding="utf-8"?>
-<p:notes xmlns:a="http://schemas.openxmlformats.org/drawingml/2006/main" xmlns:r="http://schemas.openxmlformats.org/officeDocument/2006/relationships" xmlns:p="http://schemas.openxmlformats.org/presentationml/2006/main">
-  <p:cSld>
-    <p:spTree>
-      <p:nvGrpSpPr>
-        <p:cNvPr id="1" name=""/>
-        <p:cNvGrpSpPr/>
-        <p:nvPr/>
-      </p:nvGrpSpPr>
-      <p:grpSpPr>
-        <a:xfrm>
-          <a:off x="0" y="0"/>
-          <a:ext cx="0" cy="0"/>
-          <a:chOff x="0" y="0"/>
-          <a:chExt cx="0" cy="0"/>
-        </a:xfrm>
-      </p:grpSpPr>
-      <p:sp>
-        <p:nvSpPr>
-          <p:cNvPr id="2" name="Slide Image Placeholder 1"/>
-          <p:cNvSpPr>
-            <a:spLocks noGrp="1" noRot="1" noChangeAspect="1"/>
-          </p:cNvSpPr>
-          <p:nvPr>
-            <p:ph type="sldImg"/>
-          </p:nvPr>
-        </p:nvSpPr>
-        <p:spPr/>
-      </p:sp>
-      <p:sp>
-        <p:nvSpPr>
-          <p:cNvPr id="3" name="Notes Placeholder 2"/>
-          <p:cNvSpPr>
-            <a:spLocks noGrp="1"/>
-          </p:cNvSpPr>
-          <p:nvPr>
-            <p:ph type="body" idx="1"/>
-          </p:nvPr>
-        </p:nvSpPr>
-        <p:spPr/>
-        <p:txBody>
-          <a:bodyPr/>
-          <a:lstStyle/>
-          <a:p>
-            <a:r>
-              <a:rPr lang="en-US" dirty="0"/>
-              <a:t/>
-            </a:r>
-            <a:endParaRPr lang="en-US" dirty="0"/>
-          </a:p>
-        </p:txBody>
-      </p:sp>
-      <p:sp>
-        <p:nvSpPr>
-          <p:cNvPr id="4" name="Slide Number Placeholder 3"/>
-          <p:cNvSpPr>
-            <a:spLocks noGrp="1"/>
-          </p:cNvSpPr>
-          <p:nvPr>
-            <p:ph type="sldNum" sz="quarter" idx="10"/>
-          </p:nvPr>
-        </p:nvSpPr>
-        <p:spPr/>
-        <p:txBody>
-          <a:bodyPr/>
-          <a:lstStyle/>
-          <a:p>
-            <a:fld id="{F7021451-1387-4CA6-816F-3879F97B5CBC}" type="slidenum">
-              <a:rPr lang="en-US"/>
-              <a:t>7</a:t>
-            </a:fld>
-            <a:endParaRPr lang="en-US"/>
-          </a:p>
-        </p:txBody>
-      </p:sp>
-    </p:spTree>
-    <p:extLst>
-      <p:ext uri="{BB962C8B-B14F-4D97-AF65-F5344CB8AC3E}">
-        <p14:creationId xmlns:p14="http://schemas.microsoft.com/office/powerpoint/2010/main" val="1024086991"/>
-      </p:ext>
-    </p:extLst>
-  </p:cSld>
-  <p:clrMapOvr>
-    <a:masterClrMapping/>
-  </p:clrMapOvr>
-</p:notes>
-</file>
-
 <file path=ppt/slideLayouts/slideLayout1.xml><?xml version="1.0" encoding="utf-8"?>
 <p:sldLayout xmlns:a="http://schemas.openxmlformats.org/drawingml/2006/main" xmlns:r="http://schemas.openxmlformats.org/officeDocument/2006/relationships" xmlns:p="http://schemas.openxmlformats.org/presentationml/2006/main" preserve="1">
   <p:cSld name="DEFAULT">
@@ -1549,7 +1460,7 @@
         <p:spPr>
           <a:xfrm>
             <a:off x="777240" y="3063240"/>
-            <a:ext cx="10424160" cy="1828800"/>
+            <a:ext cx="10607040" cy="1828800"/>
           </a:xfrm>
           <a:prstGeom prst="rect">
             <a:avLst/>
@@ -1568,7 +1479,7 @@
               <a:buNone/>
             </a:pPr>
             <a:r>
-              <a:rPr lang="en-US" sz="4200" b="1" dirty="0">
+              <a:rPr lang="en-US" sz="4000" b="1" dirty="0">
                 <a:solidFill>
                   <a:srgbClr val="FFFFFF"/>
                 </a:solidFill>
@@ -1578,7 +1489,7 @@
               </a:rPr>
               <a:t>Kompyuter tuzilishi, tashqi va ichki qurilmalar</a:t>
             </a:r>
-            <a:endParaRPr lang="en-US" sz="4200" dirty="0"/>
+            <a:endParaRPr lang="en-US" sz="4000" dirty="0"/>
           </a:p>
         </p:txBody>
       </p:sp>
@@ -1824,7 +1735,7 @@
         <p:spPr>
           <a:xfrm>
             <a:off x="713232" y="365760"/>
-            <a:ext cx="10058400" cy="548640"/>
+            <a:ext cx="10972800" cy="548640"/>
           </a:xfrm>
           <a:prstGeom prst="rect">
             <a:avLst/>
@@ -1840,7 +1751,7 @@
               <a:buNone/>
             </a:pPr>
             <a:r>
-              <a:rPr lang="en-US" sz="2700" b="1" dirty="0">
+              <a:rPr lang="en-US" sz="2600" b="1" dirty="0">
                 <a:solidFill>
                   <a:srgbClr val="1F2A6E"/>
                 </a:solidFill>
@@ -1850,7 +1761,7 @@
               </a:rPr>
               <a:t>Dars maqsadi va rejasi</a:t>
             </a:r>
-            <a:endParaRPr lang="en-US" sz="2700" dirty="0"/>
+            <a:endParaRPr lang="en-US" sz="2600" dirty="0"/>
           </a:p>
         </p:txBody>
       </p:sp>
@@ -1974,7 +1885,7 @@
               <a:buNone/>
             </a:pPr>
             <a:r>
-              <a:rPr lang="en-US" sz="1550" dirty="0">
+              <a:rPr lang="en-US" sz="1500" dirty="0">
                 <a:solidFill>
                   <a:srgbClr val="E8ECF8"/>
                 </a:solidFill>
@@ -1982,9 +1893,9 @@
                 <a:ea typeface="Calibri" pitchFamily="34" charset="-122"/>
                 <a:cs typeface="Calibri" pitchFamily="34" charset="-120"/>
               </a:rPr>
-              <a:t>O'quvchilarda kompyuterning umumiy tuzilishi, uning tashqi (periferiya) va ichki qurilmalari hamda ularning vazifalari haqida boshlang'ich tushuncha hosil qilish; klaviatura va sichqonchada ishonchli ishlash ko'nikmasini shakllantirish.</a:t>
-            </a:r>
-            <a:endParaRPr lang="en-US" sz="1550" dirty="0"/>
+              <a:t>O'quvchilarda kompyuterning umumiy tuzilishi, tashqi va ichki qurilmalari hamda ularning vazifalari haqida tushuncha hosil qilish; klaviatura va sichqonchada ishonchli ishlash ko'nikmasini shakllantirish.</a:t>
+            </a:r>
+            <a:endParaRPr lang="en-US" sz="1500" dirty="0"/>
           </a:p>
         </p:txBody>
       </p:sp>
@@ -2035,7 +1946,7 @@
         </p:nvSpPr>
         <p:spPr>
           <a:xfrm>
-            <a:off x="5852160" y="1828800"/>
+            <a:off x="5852160" y="1874520"/>
             <a:ext cx="457200" cy="457200"/>
           </a:xfrm>
           <a:prstGeom prst="ellipse">
@@ -2055,7 +1966,7 @@
         </p:nvSpPr>
         <p:spPr>
           <a:xfrm>
-            <a:off x="5852160" y="1828800"/>
+            <a:off x="5852160" y="1874520"/>
             <a:ext cx="457200" cy="457200"/>
           </a:xfrm>
           <a:prstGeom prst="rect">
@@ -2094,8 +2005,8 @@
         </p:nvSpPr>
         <p:spPr>
           <a:xfrm>
-            <a:off x="6492240" y="1783080"/>
-            <a:ext cx="5120640" cy="548640"/>
+            <a:off x="6492240" y="1801368"/>
+            <a:ext cx="5212080" cy="603504"/>
           </a:xfrm>
           <a:prstGeom prst="rect">
             <a:avLst/>
@@ -2111,7 +2022,7 @@
               <a:buNone/>
             </a:pPr>
             <a:r>
-              <a:rPr lang="en-US" sz="1500" dirty="0">
+              <a:rPr lang="en-US" sz="1450" dirty="0">
                 <a:solidFill>
                   <a:srgbClr val="1C2333"/>
                 </a:solidFill>
@@ -2121,7 +2032,7 @@
               </a:rPr>
               <a:t>Kompyuter nima va u qanday ishlaydi</a:t>
             </a:r>
-            <a:endParaRPr lang="en-US" sz="1500" dirty="0"/>
+            <a:endParaRPr lang="en-US" sz="1450" dirty="0"/>
           </a:p>
         </p:txBody>
       </p:sp>
@@ -2133,7 +2044,7 @@
         </p:nvSpPr>
         <p:spPr>
           <a:xfrm>
-            <a:off x="5852160" y="2615184"/>
+            <a:off x="5852160" y="2660904"/>
             <a:ext cx="457200" cy="457200"/>
           </a:xfrm>
           <a:prstGeom prst="ellipse">
@@ -2153,7 +2064,7 @@
         </p:nvSpPr>
         <p:spPr>
           <a:xfrm>
-            <a:off x="5852160" y="2615184"/>
+            <a:off x="5852160" y="2660904"/>
             <a:ext cx="457200" cy="457200"/>
           </a:xfrm>
           <a:prstGeom prst="rect">
@@ -2192,8 +2103,8 @@
         </p:nvSpPr>
         <p:spPr>
           <a:xfrm>
-            <a:off x="6492240" y="2569464"/>
-            <a:ext cx="5120640" cy="548640"/>
+            <a:off x="6492240" y="2587752"/>
+            <a:ext cx="5212080" cy="603504"/>
           </a:xfrm>
           <a:prstGeom prst="rect">
             <a:avLst/>
@@ -2209,7 +2120,7 @@
               <a:buNone/>
             </a:pPr>
             <a:r>
-              <a:rPr lang="en-US" sz="1500" dirty="0">
+              <a:rPr lang="en-US" sz="1450" dirty="0">
                 <a:solidFill>
                   <a:srgbClr val="1C2333"/>
                 </a:solidFill>
@@ -2217,9 +2128,9 @@
                 <a:ea typeface="Calibri" pitchFamily="34" charset="-122"/>
                 <a:cs typeface="Calibri" pitchFamily="34" charset="-120"/>
               </a:rPr>
-              <a:t>Tashqi (periferiya) qurilmalar va ularning vazifasi</a:t>
-            </a:r>
-            <a:endParaRPr lang="en-US" sz="1500" dirty="0"/>
+              <a:t>Tashqi (periferiya) qurilmalar</a:t>
+            </a:r>
+            <a:endParaRPr lang="en-US" sz="1450" dirty="0"/>
           </a:p>
         </p:txBody>
       </p:sp>
@@ -2231,7 +2142,7 @@
         </p:nvSpPr>
         <p:spPr>
           <a:xfrm>
-            <a:off x="5852160" y="3401568"/>
+            <a:off x="5852160" y="3447288"/>
             <a:ext cx="457200" cy="457200"/>
           </a:xfrm>
           <a:prstGeom prst="ellipse">
@@ -2251,7 +2162,7 @@
         </p:nvSpPr>
         <p:spPr>
           <a:xfrm>
-            <a:off x="5852160" y="3401568"/>
+            <a:off x="5852160" y="3447288"/>
             <a:ext cx="457200" cy="457200"/>
           </a:xfrm>
           <a:prstGeom prst="rect">
@@ -2290,8 +2201,8 @@
         </p:nvSpPr>
         <p:spPr>
           <a:xfrm>
-            <a:off x="6492240" y="3355848"/>
-            <a:ext cx="5120640" cy="548640"/>
+            <a:off x="6492240" y="3374136"/>
+            <a:ext cx="5212080" cy="603504"/>
           </a:xfrm>
           <a:prstGeom prst="rect">
             <a:avLst/>
@@ -2307,7 +2218,7 @@
               <a:buNone/>
             </a:pPr>
             <a:r>
-              <a:rPr lang="en-US" sz="1500" dirty="0">
+              <a:rPr lang="en-US" sz="1450" dirty="0">
                 <a:solidFill>
                   <a:srgbClr val="1C2333"/>
                 </a:solidFill>
@@ -2315,9 +2226,9 @@
                 <a:ea typeface="Calibri" pitchFamily="34" charset="-122"/>
                 <a:cs typeface="Calibri" pitchFamily="34" charset="-120"/>
               </a:rPr>
-              <a:t>Ichki qurilmalar - tizim bloki tarkibi</a:t>
-            </a:r>
-            <a:endParaRPr lang="en-US" sz="1500" dirty="0"/>
+              <a:t>Ichki qurilmalar — tizim bloki tarkibi</a:t>
+            </a:r>
+            <a:endParaRPr lang="en-US" sz="1450" dirty="0"/>
           </a:p>
         </p:txBody>
       </p:sp>
@@ -2329,7 +2240,7 @@
         </p:nvSpPr>
         <p:spPr>
           <a:xfrm>
-            <a:off x="5852160" y="4187952"/>
+            <a:off x="5852160" y="4233672"/>
             <a:ext cx="457200" cy="457200"/>
           </a:xfrm>
           <a:prstGeom prst="ellipse">
@@ -2349,7 +2260,7 @@
         </p:nvSpPr>
         <p:spPr>
           <a:xfrm>
-            <a:off x="5852160" y="4187952"/>
+            <a:off x="5852160" y="4233672"/>
             <a:ext cx="457200" cy="457200"/>
           </a:xfrm>
           <a:prstGeom prst="rect">
@@ -2388,8 +2299,8 @@
         </p:nvSpPr>
         <p:spPr>
           <a:xfrm>
-            <a:off x="6492240" y="4142232"/>
-            <a:ext cx="5120640" cy="548640"/>
+            <a:off x="6492240" y="4160520"/>
+            <a:ext cx="5212080" cy="603504"/>
           </a:xfrm>
           <a:prstGeom prst="rect">
             <a:avLst/>
@@ -2405,7 +2316,7 @@
               <a:buNone/>
             </a:pPr>
             <a:r>
-              <a:rPr lang="en-US" sz="1500" dirty="0">
+              <a:rPr lang="en-US" sz="1450" dirty="0">
                 <a:solidFill>
                   <a:srgbClr val="1C2333"/>
                 </a:solidFill>
@@ -2415,111 +2326,13 @@
               </a:rPr>
               <a:t>Kirish va chiqish qurilmalari</a:t>
             </a:r>
-            <a:endParaRPr lang="en-US" sz="1500" dirty="0"/>
-          </a:p>
-        </p:txBody>
-      </p:sp>
-      <p:sp>
-        <p:nvSpPr>
-          <p:cNvPr id="21" name="Shape 18"/>
-          <p:cNvSpPr/>
-          <p:nvPr/>
-        </p:nvSpPr>
-        <p:spPr>
-          <a:xfrm>
-            <a:off x="5852160" y="4974336"/>
-            <a:ext cx="457200" cy="457200"/>
-          </a:xfrm>
-          <a:prstGeom prst="ellipse">
-            <a:avLst/>
-          </a:prstGeom>
-          <a:solidFill>
-            <a:srgbClr val="6A2C91"/>
-          </a:solidFill>
-          <a:ln/>
-        </p:spPr>
-      </p:sp>
-      <p:sp>
-        <p:nvSpPr>
-          <p:cNvPr id="22" name="Text 19"/>
-          <p:cNvSpPr/>
-          <p:nvPr/>
-        </p:nvSpPr>
-        <p:spPr>
-          <a:xfrm>
-            <a:off x="5852160" y="4974336"/>
-            <a:ext cx="457200" cy="457200"/>
-          </a:xfrm>
-          <a:prstGeom prst="rect">
-            <a:avLst/>
-          </a:prstGeom>
-          <a:noFill/>
-          <a:ln/>
-        </p:spPr>
-        <p:txBody>
-          <a:bodyPr wrap="square" rtlCol="0" anchor="ctr"/>
-          <a:lstStyle/>
-          <a:p>
-            <a:pPr algn="ctr" indent="0" marL="0">
-              <a:buNone/>
-            </a:pPr>
-            <a:r>
-              <a:rPr lang="en-US" sz="1600" b="1" dirty="0">
-                <a:solidFill>
-                  <a:srgbClr val="FFFFFF"/>
-                </a:solidFill>
-                <a:latin typeface="Cambria" pitchFamily="34" charset="0"/>
-                <a:ea typeface="Cambria" pitchFamily="34" charset="-122"/>
-                <a:cs typeface="Cambria" pitchFamily="34" charset="-120"/>
-              </a:rPr>
-              <a:t>5</a:t>
-            </a:r>
-            <a:endParaRPr lang="en-US" sz="1600" dirty="0"/>
-          </a:p>
-        </p:txBody>
-      </p:sp>
-      <p:sp>
-        <p:nvSpPr>
-          <p:cNvPr id="23" name="Text 20"/>
-          <p:cNvSpPr/>
-          <p:nvPr/>
-        </p:nvSpPr>
-        <p:spPr>
-          <a:xfrm>
-            <a:off x="6492240" y="4928616"/>
-            <a:ext cx="5120640" cy="548640"/>
-          </a:xfrm>
-          <a:prstGeom prst="rect">
-            <a:avLst/>
-          </a:prstGeom>
-          <a:noFill/>
-          <a:ln/>
-        </p:spPr>
-        <p:txBody>
-          <a:bodyPr wrap="square" rtlCol="0" anchor="ctr"/>
-          <a:lstStyle/>
-          <a:p>
-            <a:pPr indent="0" marL="0">
-              <a:buNone/>
-            </a:pPr>
-            <a:r>
-              <a:rPr lang="en-US" sz="1500" dirty="0">
-                <a:solidFill>
-                  <a:srgbClr val="1C2333"/>
-                </a:solidFill>
-                <a:latin typeface="Calibri" pitchFamily="34" charset="0"/>
-                <a:ea typeface="Calibri" pitchFamily="34" charset="-122"/>
-                <a:cs typeface="Calibri" pitchFamily="34" charset="-120"/>
-              </a:rPr>
-              <a:t>Amaliy mashq: klaviatura va sichqoncha trenajyori</a:t>
-            </a:r>
-            <a:endParaRPr lang="en-US" sz="1500" dirty="0"/>
+            <a:endParaRPr lang="en-US" sz="1450" dirty="0"/>
           </a:p>
         </p:txBody>
       </p:sp>
       <p:pic>
         <p:nvPicPr>
-          <p:cNvPr id="24" name="Image 1" descr="/sessions/ecstatic-admiring-tesla/mnt/outputs/assets/logo.png">    </p:cNvPr>
+          <p:cNvPr id="21" name="Image 1" descr="/sessions/ecstatic-admiring-tesla/mnt/outputs/assets/logo.png">    </p:cNvPr>
           <p:cNvPicPr>
             <a:picLocks noChangeAspect="1"/>
           </p:cNvPicPr>
@@ -2543,7 +2356,7 @@
       </p:pic>
       <p:sp>
         <p:nvSpPr>
-          <p:cNvPr id="25" name="Text 21"/>
+          <p:cNvPr id="22" name="Text 18"/>
           <p:cNvSpPr/>
           <p:nvPr/>
         </p:nvSpPr>
@@ -2582,14 +2395,14 @@
       </p:sp>
       <p:sp>
         <p:nvSpPr>
-          <p:cNvPr id="26" name="Text 22"/>
-          <p:cNvSpPr/>
-          <p:nvPr/>
-        </p:nvSpPr>
-        <p:spPr>
-          <a:xfrm>
-            <a:off x="9997135" y="6327648"/>
-            <a:ext cx="1737360" cy="365760"/>
+          <p:cNvPr id="23" name="Text 19"/>
+          <p:cNvSpPr/>
+          <p:nvPr/>
+        </p:nvSpPr>
+        <p:spPr>
+          <a:xfrm>
+            <a:off x="9814255" y="6327648"/>
+            <a:ext cx="1920240" cy="365760"/>
           </a:xfrm>
           <a:prstGeom prst="rect">
             <a:avLst/>
@@ -2682,7 +2495,7 @@
         <p:spPr>
           <a:xfrm>
             <a:off x="713232" y="365760"/>
-            <a:ext cx="10058400" cy="548640"/>
+            <a:ext cx="10972800" cy="548640"/>
           </a:xfrm>
           <a:prstGeom prst="rect">
             <a:avLst/>
@@ -2698,7 +2511,7 @@
               <a:buNone/>
             </a:pPr>
             <a:r>
-              <a:rPr lang="en-US" sz="2700" b="1" dirty="0">
+              <a:rPr lang="en-US" sz="2600" b="1" dirty="0">
                 <a:solidFill>
                   <a:srgbClr val="1F2A6E"/>
                 </a:solidFill>
@@ -2706,9 +2519,9 @@
                 <a:ea typeface="Cambria" pitchFamily="34" charset="-122"/>
                 <a:cs typeface="Cambria" pitchFamily="34" charset="-120"/>
               </a:rPr>
-              <a:t>Tashqi (periferiya) qurilmalar</a:t>
-            </a:r>
-            <a:endParaRPr lang="en-US" sz="2700" dirty="0"/>
+              <a:t>Nazariy asoslar</a:t>
+            </a:r>
+            <a:endParaRPr lang="en-US" sz="2600" dirty="0"/>
           </a:p>
         </p:txBody>
       </p:sp>
@@ -2749,14 +2562,14 @@
         </p:nvSpPr>
         <p:spPr>
           <a:xfrm>
-            <a:off x="731520" y="1618488"/>
-            <a:ext cx="749808" cy="749808"/>
+            <a:off x="731520" y="1600200"/>
+            <a:ext cx="731520" cy="731520"/>
           </a:xfrm>
           <a:prstGeom prst="ellipse">
             <a:avLst/>
           </a:prstGeom>
           <a:solidFill>
-            <a:srgbClr val="1FA8C9"/>
+            <a:srgbClr val="E91E8C"/>
           </a:solidFill>
           <a:ln/>
         </p:spPr>
@@ -2777,7 +2590,7 @@
         </p:blipFill>
         <p:spPr>
           <a:xfrm>
-            <a:off x="905256" y="1792224"/>
+            <a:off x="896112" y="1764792"/>
             <a:ext cx="402336" cy="402336"/>
           </a:xfrm>
           <a:prstGeom prst="rect">
@@ -2793,8 +2606,8 @@
         </p:nvSpPr>
         <p:spPr>
           <a:xfrm>
-            <a:off x="731520" y="2441448"/>
-            <a:ext cx="3063240" cy="411480"/>
+            <a:off x="731520" y="2404872"/>
+            <a:ext cx="3108960" cy="411480"/>
           </a:xfrm>
           <a:prstGeom prst="rect">
             <a:avLst/>
@@ -2810,7 +2623,7 @@
               <a:buNone/>
             </a:pPr>
             <a:r>
-              <a:rPr lang="en-US" sz="1550" b="1" dirty="0">
+              <a:rPr lang="en-US" sz="1450" b="1" dirty="0">
                 <a:solidFill>
                   <a:srgbClr val="1F2A6E"/>
                 </a:solidFill>
@@ -2818,9 +2631,9 @@
                 <a:ea typeface="Cambria" pitchFamily="34" charset="-122"/>
                 <a:cs typeface="Cambria" pitchFamily="34" charset="-120"/>
               </a:rPr>
-              <a:t>Monitor</a:t>
-            </a:r>
-            <a:endParaRPr lang="en-US" sz="1550" dirty="0"/>
+              <a:t>Kompyuter nima?</a:t>
+            </a:r>
+            <a:endParaRPr lang="en-US" sz="1450" dirty="0"/>
           </a:p>
         </p:txBody>
       </p:sp>
@@ -2832,8 +2645,8 @@
         </p:nvSpPr>
         <p:spPr>
           <a:xfrm>
-            <a:off x="731520" y="2788920"/>
-            <a:ext cx="3108960" cy="457200"/>
+            <a:off x="731520" y="2770632"/>
+            <a:ext cx="3136392" cy="475488"/>
           </a:xfrm>
           <a:prstGeom prst="rect">
             <a:avLst/>
@@ -2847,12 +2660,12 @@
           <a:p>
             <a:pPr indent="0" marL="0">
               <a:lnSpc>
-                <a:spcPct val="102000"/>
+                <a:spcPct val="100000"/>
               </a:lnSpc>
               <a:buNone/>
             </a:pPr>
             <a:r>
-              <a:rPr lang="en-US" sz="1150" dirty="0">
+              <a:rPr lang="en-US" sz="1080" dirty="0">
                 <a:solidFill>
                   <a:srgbClr val="5B6472"/>
                 </a:solidFill>
@@ -2860,9 +2673,9 @@
                 <a:ea typeface="Calibri" pitchFamily="34" charset="-122"/>
                 <a:cs typeface="Calibri" pitchFamily="34" charset="-120"/>
               </a:rPr>
-              <a:t>Ma'lumotni ekranda tasvirlaydigan asosiy chiqish qurilmasi.</a:t>
-            </a:r>
-            <a:endParaRPr lang="en-US" sz="1150" dirty="0"/>
+              <a:t>Ma'lumotni qayta ishlovchi elektron qurilma.</a:t>
+            </a:r>
+            <a:endParaRPr lang="en-US" sz="1080" dirty="0"/>
           </a:p>
         </p:txBody>
       </p:sp>
@@ -2903,14 +2716,14 @@
         </p:nvSpPr>
         <p:spPr>
           <a:xfrm>
-            <a:off x="4590288" y="1618488"/>
-            <a:ext cx="749808" cy="749808"/>
+            <a:off x="4590288" y="1600200"/>
+            <a:ext cx="731520" cy="731520"/>
           </a:xfrm>
           <a:prstGeom prst="ellipse">
             <a:avLst/>
           </a:prstGeom>
           <a:solidFill>
-            <a:srgbClr val="1F2A6E"/>
+            <a:srgbClr val="1FA8C9"/>
           </a:solidFill>
           <a:ln/>
         </p:spPr>
@@ -2931,7 +2744,7 @@
         </p:blipFill>
         <p:spPr>
           <a:xfrm>
-            <a:off x="4764024" y="1792224"/>
+            <a:off x="4754880" y="1764792"/>
             <a:ext cx="402336" cy="402336"/>
           </a:xfrm>
           <a:prstGeom prst="rect">
@@ -2947,8 +2760,8 @@
         </p:nvSpPr>
         <p:spPr>
           <a:xfrm>
-            <a:off x="4590288" y="2441448"/>
-            <a:ext cx="3063240" cy="411480"/>
+            <a:off x="4590288" y="2404872"/>
+            <a:ext cx="3108960" cy="411480"/>
           </a:xfrm>
           <a:prstGeom prst="rect">
             <a:avLst/>
@@ -2964,7 +2777,7 @@
               <a:buNone/>
             </a:pPr>
             <a:r>
-              <a:rPr lang="en-US" sz="1550" b="1" dirty="0">
+              <a:rPr lang="en-US" sz="1450" b="1" dirty="0">
                 <a:solidFill>
                   <a:srgbClr val="1F2A6E"/>
                 </a:solidFill>
@@ -2972,9 +2785,9 @@
                 <a:ea typeface="Cambria" pitchFamily="34" charset="-122"/>
                 <a:cs typeface="Cambria" pitchFamily="34" charset="-120"/>
               </a:rPr>
-              <a:t>Klaviatura</a:t>
-            </a:r>
-            <a:endParaRPr lang="en-US" sz="1550" dirty="0"/>
+              <a:t>Tashqi qurilmalar</a:t>
+            </a:r>
+            <a:endParaRPr lang="en-US" sz="1450" dirty="0"/>
           </a:p>
         </p:txBody>
       </p:sp>
@@ -2986,8 +2799,8 @@
         </p:nvSpPr>
         <p:spPr>
           <a:xfrm>
-            <a:off x="4590288" y="2788920"/>
-            <a:ext cx="3108960" cy="457200"/>
+            <a:off x="4590288" y="2770632"/>
+            <a:ext cx="3136392" cy="475488"/>
           </a:xfrm>
           <a:prstGeom prst="rect">
             <a:avLst/>
@@ -3001,12 +2814,12 @@
           <a:p>
             <a:pPr indent="0" marL="0">
               <a:lnSpc>
-                <a:spcPct val="102000"/>
+                <a:spcPct val="100000"/>
               </a:lnSpc>
               <a:buNone/>
             </a:pPr>
             <a:r>
-              <a:rPr lang="en-US" sz="1150" dirty="0">
+              <a:rPr lang="en-US" sz="1080" dirty="0">
                 <a:solidFill>
                   <a:srgbClr val="5B6472"/>
                 </a:solidFill>
@@ -3014,9 +2827,9 @@
                 <a:ea typeface="Calibri" pitchFamily="34" charset="-122"/>
                 <a:cs typeface="Calibri" pitchFamily="34" charset="-120"/>
               </a:rPr>
-              <a:t>Matn, raqam va buyruqlarni kiritish uchun xizmat qiladi.</a:t>
-            </a:r>
-            <a:endParaRPr lang="en-US" sz="1150" dirty="0"/>
+              <a:t>Monitor, klaviatura, sichqoncha, printer va h.k.</a:t>
+            </a:r>
+            <a:endParaRPr lang="en-US" sz="1080" dirty="0"/>
           </a:p>
         </p:txBody>
       </p:sp>
@@ -3057,8 +2870,8 @@
         </p:nvSpPr>
         <p:spPr>
           <a:xfrm>
-            <a:off x="8449056" y="1618488"/>
-            <a:ext cx="749808" cy="749808"/>
+            <a:off x="8449056" y="1600200"/>
+            <a:ext cx="731520" cy="731520"/>
           </a:xfrm>
           <a:prstGeom prst="ellipse">
             <a:avLst/>
@@ -3085,7 +2898,7 @@
         </p:blipFill>
         <p:spPr>
           <a:xfrm>
-            <a:off x="8622792" y="1792224"/>
+            <a:off x="8613648" y="1764792"/>
             <a:ext cx="402336" cy="402336"/>
           </a:xfrm>
           <a:prstGeom prst="rect">
@@ -3101,8 +2914,8 @@
         </p:nvSpPr>
         <p:spPr>
           <a:xfrm>
-            <a:off x="8449056" y="2441448"/>
-            <a:ext cx="3063240" cy="411480"/>
+            <a:off x="8449056" y="2404872"/>
+            <a:ext cx="3108960" cy="411480"/>
           </a:xfrm>
           <a:prstGeom prst="rect">
             <a:avLst/>
@@ -3118,7 +2931,7 @@
               <a:buNone/>
             </a:pPr>
             <a:r>
-              <a:rPr lang="en-US" sz="1550" b="1" dirty="0">
+              <a:rPr lang="en-US" sz="1450" b="1" dirty="0">
                 <a:solidFill>
                   <a:srgbClr val="1F2A6E"/>
                 </a:solidFill>
@@ -3126,9 +2939,9 @@
                 <a:ea typeface="Cambria" pitchFamily="34" charset="-122"/>
                 <a:cs typeface="Cambria" pitchFamily="34" charset="-120"/>
               </a:rPr>
-              <a:t>Sichqoncha</a:t>
-            </a:r>
-            <a:endParaRPr lang="en-US" sz="1550" dirty="0"/>
+              <a:t>Ichki qurilmalar</a:t>
+            </a:r>
+            <a:endParaRPr lang="en-US" sz="1450" dirty="0"/>
           </a:p>
         </p:txBody>
       </p:sp>
@@ -3140,8 +2953,8 @@
         </p:nvSpPr>
         <p:spPr>
           <a:xfrm>
-            <a:off x="8449056" y="2788920"/>
-            <a:ext cx="3108960" cy="457200"/>
+            <a:off x="8449056" y="2770632"/>
+            <a:ext cx="3136392" cy="475488"/>
           </a:xfrm>
           <a:prstGeom prst="rect">
             <a:avLst/>
@@ -3155,12 +2968,12 @@
           <a:p>
             <a:pPr indent="0" marL="0">
               <a:lnSpc>
-                <a:spcPct val="102000"/>
+                <a:spcPct val="100000"/>
               </a:lnSpc>
               <a:buNone/>
             </a:pPr>
             <a:r>
-              <a:rPr lang="en-US" sz="1150" dirty="0">
+              <a:rPr lang="en-US" sz="1080" dirty="0">
                 <a:solidFill>
                   <a:srgbClr val="5B6472"/>
                 </a:solidFill>
@@ -3168,9 +2981,9 @@
                 <a:ea typeface="Calibri" pitchFamily="34" charset="-122"/>
                 <a:cs typeface="Calibri" pitchFamily="34" charset="-120"/>
               </a:rPr>
-              <a:t>Kursorni boshqarish, tanlash va bosish qurilmasi.</a:t>
-            </a:r>
-            <a:endParaRPr lang="en-US" sz="1150" dirty="0"/>
+              <a:t>CPU, RAM, disk, ona plata, GPU.</a:t>
+            </a:r>
+            <a:endParaRPr lang="en-US" sz="1080" dirty="0"/>
           </a:p>
         </p:txBody>
       </p:sp>
@@ -3211,8 +3024,8 @@
         </p:nvSpPr>
         <p:spPr>
           <a:xfrm>
-            <a:off x="731520" y="3867912"/>
-            <a:ext cx="749808" cy="749808"/>
+            <a:off x="731520" y="3849624"/>
+            <a:ext cx="731520" cy="731520"/>
           </a:xfrm>
           <a:prstGeom prst="ellipse">
             <a:avLst/>
@@ -3239,7 +3052,7 @@
         </p:blipFill>
         <p:spPr>
           <a:xfrm>
-            <a:off x="905256" y="4041648"/>
+            <a:off x="896112" y="4014216"/>
             <a:ext cx="402336" cy="402336"/>
           </a:xfrm>
           <a:prstGeom prst="rect">
@@ -3255,8 +3068,8 @@
         </p:nvSpPr>
         <p:spPr>
           <a:xfrm>
-            <a:off x="731520" y="4690872"/>
-            <a:ext cx="3063240" cy="411480"/>
+            <a:off x="731520" y="4654296"/>
+            <a:ext cx="3108960" cy="411480"/>
           </a:xfrm>
           <a:prstGeom prst="rect">
             <a:avLst/>
@@ -3272,7 +3085,7 @@
               <a:buNone/>
             </a:pPr>
             <a:r>
-              <a:rPr lang="en-US" sz="1550" b="1" dirty="0">
+              <a:rPr lang="en-US" sz="1450" b="1" dirty="0">
                 <a:solidFill>
                   <a:srgbClr val="1F2A6E"/>
                 </a:solidFill>
@@ -3280,9 +3093,9 @@
                 <a:ea typeface="Cambria" pitchFamily="34" charset="-122"/>
                 <a:cs typeface="Cambria" pitchFamily="34" charset="-120"/>
               </a:rPr>
-              <a:t>Printer</a:t>
-            </a:r>
-            <a:endParaRPr lang="en-US" sz="1550" dirty="0"/>
+              <a:t>Kirish/chiqish</a:t>
+            </a:r>
+            <a:endParaRPr lang="en-US" sz="1450" dirty="0"/>
           </a:p>
         </p:txBody>
       </p:sp>
@@ -3294,8 +3107,8 @@
         </p:nvSpPr>
         <p:spPr>
           <a:xfrm>
-            <a:off x="731520" y="5038344"/>
-            <a:ext cx="3108960" cy="457200"/>
+            <a:off x="731520" y="5020056"/>
+            <a:ext cx="3136392" cy="475488"/>
           </a:xfrm>
           <a:prstGeom prst="rect">
             <a:avLst/>
@@ -3309,12 +3122,12 @@
           <a:p>
             <a:pPr indent="0" marL="0">
               <a:lnSpc>
-                <a:spcPct val="102000"/>
+                <a:spcPct val="100000"/>
               </a:lnSpc>
               <a:buNone/>
             </a:pPr>
             <a:r>
-              <a:rPr lang="en-US" sz="1150" dirty="0">
+              <a:rPr lang="en-US" sz="1080" dirty="0">
                 <a:solidFill>
                   <a:srgbClr val="5B6472"/>
                 </a:solidFill>
@@ -3322,64 +3135,15 @@
                 <a:ea typeface="Calibri" pitchFamily="34" charset="-122"/>
                 <a:cs typeface="Calibri" pitchFamily="34" charset="-120"/>
               </a:rPr>
-              <a:t>Hujjat va rasmlarni qog'ozga chop etadi.</a:t>
-            </a:r>
-            <a:endParaRPr lang="en-US" sz="1150" dirty="0"/>
-          </a:p>
-        </p:txBody>
-      </p:sp>
-      <p:sp>
-        <p:nvSpPr>
-          <p:cNvPr id="24" name="Shape 18"/>
-          <p:cNvSpPr/>
-          <p:nvPr/>
-        </p:nvSpPr>
-        <p:spPr>
-          <a:xfrm>
-            <a:off x="4315968" y="3575304"/>
-            <a:ext cx="3611880" cy="1993392"/>
-          </a:xfrm>
-          <a:prstGeom prst="roundRect">
-            <a:avLst>
-              <a:gd name="adj" fmla="val 4128"/>
-            </a:avLst>
-          </a:prstGeom>
-          <a:solidFill>
-            <a:srgbClr val="FFFFFF"/>
-          </a:solidFill>
-          <a:ln/>
-          <a:effectLst>
-            <a:outerShdw sx="100000" sy="100000" kx="0" ky="0" algn="bl" rotWithShape="0" blurRad="114300" dist="38100" dir="5400000">
-              <a:srgbClr val="9AA5B8">
-                <a:alpha val="28000"/>
-              </a:srgbClr>
-            </a:outerShdw>
-          </a:effectLst>
-        </p:spPr>
-      </p:sp>
-      <p:sp>
-        <p:nvSpPr>
-          <p:cNvPr id="25" name="Shape 19"/>
-          <p:cNvSpPr/>
-          <p:nvPr/>
-        </p:nvSpPr>
-        <p:spPr>
-          <a:xfrm>
-            <a:off x="4590288" y="3867912"/>
-            <a:ext cx="749808" cy="749808"/>
-          </a:xfrm>
-          <a:prstGeom prst="ellipse">
-            <a:avLst/>
-          </a:prstGeom>
-          <a:solidFill>
-            <a:srgbClr val="6A2C91"/>
-          </a:solidFill>
-          <a:ln/>
-        </p:spPr>
+              <a:t>Input ma'lumot kiritadi, output chiqaradi.</a:t>
+            </a:r>
+            <a:endParaRPr lang="en-US" sz="1080" dirty="0"/>
+          </a:p>
+        </p:txBody>
       </p:sp>
       <p:pic>
         <p:nvPicPr>
-          <p:cNvPr id="26" name="Image 4" descr="preencoded.png">    </p:cNvPr>
+          <p:cNvPr id="24" name="Image 4" descr="/sessions/ecstatic-admiring-tesla/mnt/outputs/assets/logo.png">    </p:cNvPr>
           <p:cNvPicPr>
             <a:picLocks noChangeAspect="1"/>
           </p:cNvPicPr>
@@ -3393,8 +3157,8 @@
         </p:blipFill>
         <p:spPr>
           <a:xfrm>
-            <a:off x="4764024" y="4041648"/>
-            <a:ext cx="402336" cy="402336"/>
+            <a:off x="457200" y="6291072"/>
+            <a:ext cx="1051560" cy="493776"/>
           </a:xfrm>
           <a:prstGeom prst="rect">
             <a:avLst/>
@@ -3403,14 +3167,14 @@
       </p:pic>
       <p:sp>
         <p:nvSpPr>
-          <p:cNvPr id="27" name="Text 20"/>
-          <p:cNvSpPr/>
-          <p:nvPr/>
-        </p:nvSpPr>
-        <p:spPr>
-          <a:xfrm>
-            <a:off x="4590288" y="4690872"/>
-            <a:ext cx="3063240" cy="411480"/>
+          <p:cNvPr id="25" name="Text 18"/>
+          <p:cNvSpPr/>
+          <p:nvPr/>
+        </p:nvSpPr>
+        <p:spPr>
+          <a:xfrm>
+            <a:off x="1645920" y="6327648"/>
+            <a:ext cx="7315200" cy="365760"/>
           </a:xfrm>
           <a:prstGeom prst="rect">
             <a:avLst/>
@@ -3426,49 +3190,7 @@
               <a:buNone/>
             </a:pPr>
             <a:r>
-              <a:rPr lang="en-US" sz="1550" b="1" dirty="0">
-                <a:solidFill>
-                  <a:srgbClr val="1F2A6E"/>
-                </a:solidFill>
-                <a:latin typeface="Cambria" pitchFamily="34" charset="0"/>
-                <a:ea typeface="Cambria" pitchFamily="34" charset="-122"/>
-                <a:cs typeface="Cambria" pitchFamily="34" charset="-120"/>
-              </a:rPr>
-              <a:t>Kolonka / Quloqlik</a:t>
-            </a:r>
-            <a:endParaRPr lang="en-US" sz="1550" dirty="0"/>
-          </a:p>
-        </p:txBody>
-      </p:sp>
-      <p:sp>
-        <p:nvSpPr>
-          <p:cNvPr id="28" name="Text 21"/>
-          <p:cNvSpPr/>
-          <p:nvPr/>
-        </p:nvSpPr>
-        <p:spPr>
-          <a:xfrm>
-            <a:off x="4590288" y="5038344"/>
-            <a:ext cx="3108960" cy="457200"/>
-          </a:xfrm>
-          <a:prstGeom prst="rect">
-            <a:avLst/>
-          </a:prstGeom>
-          <a:noFill/>
-          <a:ln/>
-        </p:spPr>
-        <p:txBody>
-          <a:bodyPr wrap="square" rtlCol="0" anchor="t"/>
-          <a:lstStyle/>
-          <a:p>
-            <a:pPr indent="0" marL="0">
-              <a:lnSpc>
-                <a:spcPct val="102000"/>
-              </a:lnSpc>
-              <a:buNone/>
-            </a:pPr>
-            <a:r>
-              <a:rPr lang="en-US" sz="1150" dirty="0">
+              <a:rPr lang="en-US" sz="900" dirty="0">
                 <a:solidFill>
                   <a:srgbClr val="5B6472"/>
                 </a:solidFill>
@@ -3476,95 +3198,22 @@
                 <a:ea typeface="Calibri" pitchFamily="34" charset="-122"/>
                 <a:cs typeface="Calibri" pitchFamily="34" charset="-120"/>
               </a:rPr>
-              <a:t>Tovush va ovozli ma'lumotni chiqaradi.</a:t>
-            </a:r>
-            <a:endParaRPr lang="en-US" sz="1150" dirty="0"/>
-          </a:p>
-        </p:txBody>
-      </p:sp>
-      <p:sp>
-        <p:nvSpPr>
-          <p:cNvPr id="29" name="Shape 22"/>
-          <p:cNvSpPr/>
-          <p:nvPr/>
-        </p:nvSpPr>
-        <p:spPr>
-          <a:xfrm>
-            <a:off x="8174736" y="3575304"/>
-            <a:ext cx="3611880" cy="1993392"/>
-          </a:xfrm>
-          <a:prstGeom prst="roundRect">
-            <a:avLst>
-              <a:gd name="adj" fmla="val 4128"/>
-            </a:avLst>
-          </a:prstGeom>
-          <a:solidFill>
-            <a:srgbClr val="FFFFFF"/>
-          </a:solidFill>
-          <a:ln/>
-          <a:effectLst>
-            <a:outerShdw sx="100000" sy="100000" kx="0" ky="0" algn="bl" rotWithShape="0" blurRad="114300" dist="38100" dir="5400000">
-              <a:srgbClr val="9AA5B8">
-                <a:alpha val="28000"/>
-              </a:srgbClr>
-            </a:outerShdw>
-          </a:effectLst>
-        </p:spPr>
-      </p:sp>
-      <p:sp>
-        <p:nvSpPr>
-          <p:cNvPr id="30" name="Shape 23"/>
-          <p:cNvSpPr/>
-          <p:nvPr/>
-        </p:nvSpPr>
-        <p:spPr>
-          <a:xfrm>
-            <a:off x="8449056" y="3867912"/>
-            <a:ext cx="749808" cy="749808"/>
-          </a:xfrm>
-          <a:prstGeom prst="ellipse">
-            <a:avLst/>
-          </a:prstGeom>
-          <a:solidFill>
-            <a:srgbClr val="E91E8C"/>
-          </a:solidFill>
-          <a:ln/>
-        </p:spPr>
-      </p:sp>
-      <p:pic>
-        <p:nvPicPr>
-          <p:cNvPr id="31" name="Image 5" descr="preencoded.png">    </p:cNvPr>
-          <p:cNvPicPr>
-            <a:picLocks noChangeAspect="1"/>
-          </p:cNvPicPr>
-          <p:nvPr/>
-        </p:nvPicPr>
-        <p:blipFill>
-          <a:blip r:embed="rId6"/>
-          <a:stretch>
-            <a:fillRect/>
-          </a:stretch>
-        </p:blipFill>
-        <p:spPr>
-          <a:xfrm>
-            <a:off x="8622792" y="4041648"/>
-            <a:ext cx="402336" cy="402336"/>
-          </a:xfrm>
-          <a:prstGeom prst="rect">
-            <a:avLst/>
-          </a:prstGeom>
-        </p:spPr>
-      </p:pic>
-      <p:sp>
-        <p:nvSpPr>
-          <p:cNvPr id="32" name="Text 24"/>
-          <p:cNvSpPr/>
-          <p:nvPr/>
-        </p:nvSpPr>
-        <p:spPr>
-          <a:xfrm>
-            <a:off x="8449056" y="4690872"/>
-            <a:ext cx="3063240" cy="411480"/>
+              <a:t>Yoshlar Axborot Texnologiyalari Markazi</a:t>
+            </a:r>
+            <a:endParaRPr lang="en-US" sz="900" dirty="0"/>
+          </a:p>
+        </p:txBody>
+      </p:sp>
+      <p:sp>
+        <p:nvSpPr>
+          <p:cNvPr id="26" name="Text 19"/>
+          <p:cNvSpPr/>
+          <p:nvPr/>
+        </p:nvSpPr>
+        <p:spPr>
+          <a:xfrm>
+            <a:off x="9814255" y="6327648"/>
+            <a:ext cx="1920240" cy="365760"/>
           </a:xfrm>
           <a:prstGeom prst="rect">
             <a:avLst/>
@@ -3576,53 +3225,11 @@
           <a:bodyPr wrap="square" rtlCol="0" anchor="ctr"/>
           <a:lstStyle/>
           <a:p>
-            <a:pPr indent="0" marL="0">
-              <a:buNone/>
-            </a:pPr>
-            <a:r>
-              <a:rPr lang="en-US" sz="1550" b="1" dirty="0">
-                <a:solidFill>
-                  <a:srgbClr val="1F2A6E"/>
-                </a:solidFill>
-                <a:latin typeface="Cambria" pitchFamily="34" charset="0"/>
-                <a:ea typeface="Cambria" pitchFamily="34" charset="-122"/>
-                <a:cs typeface="Cambria" pitchFamily="34" charset="-120"/>
-              </a:rPr>
-              <a:t>Veb-kamera / Skaner</a:t>
-            </a:r>
-            <a:endParaRPr lang="en-US" sz="1550" dirty="0"/>
-          </a:p>
-        </p:txBody>
-      </p:sp>
-      <p:sp>
-        <p:nvSpPr>
-          <p:cNvPr id="33" name="Text 25"/>
-          <p:cNvSpPr/>
-          <p:nvPr/>
-        </p:nvSpPr>
-        <p:spPr>
-          <a:xfrm>
-            <a:off x="8449056" y="5038344"/>
-            <a:ext cx="3108960" cy="457200"/>
-          </a:xfrm>
-          <a:prstGeom prst="rect">
-            <a:avLst/>
-          </a:prstGeom>
-          <a:noFill/>
-          <a:ln/>
-        </p:spPr>
-        <p:txBody>
-          <a:bodyPr wrap="square" rtlCol="0" anchor="t"/>
-          <a:lstStyle/>
-          <a:p>
-            <a:pPr indent="0" marL="0">
-              <a:lnSpc>
-                <a:spcPct val="102000"/>
-              </a:lnSpc>
-              <a:buNone/>
-            </a:pPr>
-            <a:r>
-              <a:rPr lang="en-US" sz="1150" dirty="0">
+            <a:pPr algn="r" indent="0" marL="0">
+              <a:buNone/>
+            </a:pPr>
+            <a:r>
+              <a:rPr lang="en-US" sz="900" dirty="0">
                 <a:solidFill>
                   <a:srgbClr val="5B6472"/>
                 </a:solidFill>
@@ -3630,109 +3237,7 @@
                 <a:ea typeface="Calibri" pitchFamily="34" charset="-122"/>
                 <a:cs typeface="Calibri" pitchFamily="34" charset="-120"/>
               </a:rPr>
-              <a:t>Tasvir va videoni kompyuterga kiritadi.</a:t>
-            </a:r>
-            <a:endParaRPr lang="en-US" sz="1150" dirty="0"/>
-          </a:p>
-        </p:txBody>
-      </p:sp>
-      <p:pic>
-        <p:nvPicPr>
-          <p:cNvPr id="34" name="Image 6" descr="/sessions/ecstatic-admiring-tesla/mnt/outputs/assets/logo.png">    </p:cNvPr>
-          <p:cNvPicPr>
-            <a:picLocks noChangeAspect="1"/>
-          </p:cNvPicPr>
-          <p:nvPr/>
-        </p:nvPicPr>
-        <p:blipFill>
-          <a:blip r:embed="rId7"/>
-          <a:stretch>
-            <a:fillRect/>
-          </a:stretch>
-        </p:blipFill>
-        <p:spPr>
-          <a:xfrm>
-            <a:off x="457200" y="6291072"/>
-            <a:ext cx="1051560" cy="493776"/>
-          </a:xfrm>
-          <a:prstGeom prst="rect">
-            <a:avLst/>
-          </a:prstGeom>
-        </p:spPr>
-      </p:pic>
-      <p:sp>
-        <p:nvSpPr>
-          <p:cNvPr id="35" name="Text 26"/>
-          <p:cNvSpPr/>
-          <p:nvPr/>
-        </p:nvSpPr>
-        <p:spPr>
-          <a:xfrm>
-            <a:off x="1645920" y="6327648"/>
-            <a:ext cx="7315200" cy="365760"/>
-          </a:xfrm>
-          <a:prstGeom prst="rect">
-            <a:avLst/>
-          </a:prstGeom>
-          <a:noFill/>
-          <a:ln/>
-        </p:spPr>
-        <p:txBody>
-          <a:bodyPr wrap="square" rtlCol="0" anchor="ctr"/>
-          <a:lstStyle/>
-          <a:p>
-            <a:pPr indent="0" marL="0">
-              <a:buNone/>
-            </a:pPr>
-            <a:r>
-              <a:rPr lang="en-US" sz="900" dirty="0">
-                <a:solidFill>
-                  <a:srgbClr val="5B6472"/>
-                </a:solidFill>
-                <a:latin typeface="Calibri" pitchFamily="34" charset="0"/>
-                <a:ea typeface="Calibri" pitchFamily="34" charset="-122"/>
-                <a:cs typeface="Calibri" pitchFamily="34" charset="-120"/>
-              </a:rPr>
-              <a:t>Yoshlar Axborot Texnologiyalari Markazi</a:t>
-            </a:r>
-            <a:endParaRPr lang="en-US" sz="900" dirty="0"/>
-          </a:p>
-        </p:txBody>
-      </p:sp>
-      <p:sp>
-        <p:nvSpPr>
-          <p:cNvPr id="36" name="Text 27"/>
-          <p:cNvSpPr/>
-          <p:nvPr/>
-        </p:nvSpPr>
-        <p:spPr>
-          <a:xfrm>
-            <a:off x="9997135" y="6327648"/>
-            <a:ext cx="1737360" cy="365760"/>
-          </a:xfrm>
-          <a:prstGeom prst="rect">
-            <a:avLst/>
-          </a:prstGeom>
-          <a:noFill/>
-          <a:ln/>
-        </p:spPr>
-        <p:txBody>
-          <a:bodyPr wrap="square" rtlCol="0" anchor="ctr"/>
-          <a:lstStyle/>
-          <a:p>
-            <a:pPr algn="r" indent="0" marL="0">
-              <a:buNone/>
-            </a:pPr>
-            <a:r>
-              <a:rPr lang="en-US" sz="900" dirty="0">
-                <a:solidFill>
-                  <a:srgbClr val="5B6472"/>
-                </a:solidFill>
-                <a:latin typeface="Calibri" pitchFamily="34" charset="0"/>
-                <a:ea typeface="Calibri" pitchFamily="34" charset="-122"/>
-                <a:cs typeface="Calibri" pitchFamily="34" charset="-120"/>
-              </a:rPr>
-              <a:t>01-dars  •  Tashqi qurilmalar</a:t>
+              <a:t>01-dars  •  Nazariy asoslar</a:t>
             </a:r>
             <a:endParaRPr lang="en-US" sz="900" dirty="0"/>
           </a:p>
@@ -3749,1125 +3254,6 @@
 <file path=ppt/slides/slide4.xml><?xml version="1.0" encoding="utf-8"?>
 <p:sld xmlns:a="http://schemas.openxmlformats.org/drawingml/2006/main" xmlns:r="http://schemas.openxmlformats.org/officeDocument/2006/relationships" xmlns:p="http://schemas.openxmlformats.org/presentationml/2006/main">
   <p:cSld name="Slide 4">
-    <p:bg>
-      <p:bgPr>
-        <a:solidFill>
-          <a:srgbClr val="F4F6FB"/>
-        </a:solidFill>
-      </p:bgPr>
-    </p:bg>
-    <p:spTree>
-      <p:nvGrpSpPr>
-        <p:cNvPr id="1" name=""/>
-        <p:cNvGrpSpPr/>
-        <p:nvPr/>
-      </p:nvGrpSpPr>
-      <p:grpSpPr>
-        <a:xfrm>
-          <a:off x="0" y="0"/>
-          <a:ext cx="0" cy="0"/>
-          <a:chOff x="0" y="0"/>
-          <a:chExt cx="0" cy="0"/>
-        </a:xfrm>
-      </p:grpSpPr>
-      <p:sp>
-        <p:nvSpPr>
-          <p:cNvPr id="2" name="Shape 0"/>
-          <p:cNvSpPr/>
-          <p:nvPr/>
-        </p:nvSpPr>
-        <p:spPr>
-          <a:xfrm>
-            <a:off x="457200" y="411480"/>
-            <a:ext cx="146304" cy="457200"/>
-          </a:xfrm>
-          <a:prstGeom prst="roundRect">
-            <a:avLst>
-              <a:gd name="adj" fmla="val 43750"/>
-            </a:avLst>
-          </a:prstGeom>
-          <a:solidFill>
-            <a:srgbClr val="6A2C91"/>
-          </a:solidFill>
-          <a:ln/>
-        </p:spPr>
-      </p:sp>
-      <p:sp>
-        <p:nvSpPr>
-          <p:cNvPr id="3" name="Text 1"/>
-          <p:cNvSpPr/>
-          <p:nvPr/>
-        </p:nvSpPr>
-        <p:spPr>
-          <a:xfrm>
-            <a:off x="713232" y="365760"/>
-            <a:ext cx="10058400" cy="548640"/>
-          </a:xfrm>
-          <a:prstGeom prst="rect">
-            <a:avLst/>
-          </a:prstGeom>
-          <a:noFill/>
-          <a:ln/>
-        </p:spPr>
-        <p:txBody>
-          <a:bodyPr wrap="square" rtlCol="0" anchor="ctr"/>
-          <a:lstStyle/>
-          <a:p>
-            <a:pPr indent="0" marL="0">
-              <a:buNone/>
-            </a:pPr>
-            <a:r>
-              <a:rPr lang="en-US" sz="2700" b="1" dirty="0">
-                <a:solidFill>
-                  <a:srgbClr val="1F2A6E"/>
-                </a:solidFill>
-                <a:latin typeface="Cambria" pitchFamily="34" charset="0"/>
-                <a:ea typeface="Cambria" pitchFamily="34" charset="-122"/>
-                <a:cs typeface="Cambria" pitchFamily="34" charset="-120"/>
-              </a:rPr>
-              <a:t>Ichki qurilmalar - tizim bloki</a:t>
-            </a:r>
-            <a:endParaRPr lang="en-US" sz="2700" dirty="0"/>
-          </a:p>
-        </p:txBody>
-      </p:sp>
-      <p:sp>
-        <p:nvSpPr>
-          <p:cNvPr id="4" name="Shape 2"/>
-          <p:cNvSpPr/>
-          <p:nvPr/>
-        </p:nvSpPr>
-        <p:spPr>
-          <a:xfrm>
-            <a:off x="457200" y="1325880"/>
-            <a:ext cx="3611880" cy="1993392"/>
-          </a:xfrm>
-          <a:prstGeom prst="roundRect">
-            <a:avLst>
-              <a:gd name="adj" fmla="val 4128"/>
-            </a:avLst>
-          </a:prstGeom>
-          <a:solidFill>
-            <a:srgbClr val="FFFFFF"/>
-          </a:solidFill>
-          <a:ln/>
-          <a:effectLst>
-            <a:outerShdw sx="100000" sy="100000" kx="0" ky="0" algn="bl" rotWithShape="0" blurRad="114300" dist="38100" dir="5400000">
-              <a:srgbClr val="9AA5B8">
-                <a:alpha val="28000"/>
-              </a:srgbClr>
-            </a:outerShdw>
-          </a:effectLst>
-        </p:spPr>
-      </p:sp>
-      <p:sp>
-        <p:nvSpPr>
-          <p:cNvPr id="5" name="Shape 3"/>
-          <p:cNvSpPr/>
-          <p:nvPr/>
-        </p:nvSpPr>
-        <p:spPr>
-          <a:xfrm>
-            <a:off x="731520" y="1618488"/>
-            <a:ext cx="749808" cy="749808"/>
-          </a:xfrm>
-          <a:prstGeom prst="ellipse">
-            <a:avLst/>
-          </a:prstGeom>
-          <a:solidFill>
-            <a:srgbClr val="1F2A6E"/>
-          </a:solidFill>
-          <a:ln/>
-        </p:spPr>
-      </p:sp>
-      <p:pic>
-        <p:nvPicPr>
-          <p:cNvPr id="6" name="Image 0" descr="preencoded.png">    </p:cNvPr>
-          <p:cNvPicPr>
-            <a:picLocks noChangeAspect="1"/>
-          </p:cNvPicPr>
-          <p:nvPr/>
-        </p:nvPicPr>
-        <p:blipFill>
-          <a:blip r:embed="rId1"/>
-          <a:stretch>
-            <a:fillRect/>
-          </a:stretch>
-        </p:blipFill>
-        <p:spPr>
-          <a:xfrm>
-            <a:off x="905256" y="1792224"/>
-            <a:ext cx="402336" cy="402336"/>
-          </a:xfrm>
-          <a:prstGeom prst="rect">
-            <a:avLst/>
-          </a:prstGeom>
-        </p:spPr>
-      </p:pic>
-      <p:sp>
-        <p:nvSpPr>
-          <p:cNvPr id="7" name="Text 4"/>
-          <p:cNvSpPr/>
-          <p:nvPr/>
-        </p:nvSpPr>
-        <p:spPr>
-          <a:xfrm>
-            <a:off x="731520" y="2441448"/>
-            <a:ext cx="3063240" cy="411480"/>
-          </a:xfrm>
-          <a:prstGeom prst="rect">
-            <a:avLst/>
-          </a:prstGeom>
-          <a:noFill/>
-          <a:ln/>
-        </p:spPr>
-        <p:txBody>
-          <a:bodyPr wrap="square" rtlCol="0" anchor="ctr"/>
-          <a:lstStyle/>
-          <a:p>
-            <a:pPr indent="0" marL="0">
-              <a:buNone/>
-            </a:pPr>
-            <a:r>
-              <a:rPr lang="en-US" sz="1550" b="1" dirty="0">
-                <a:solidFill>
-                  <a:srgbClr val="1F2A6E"/>
-                </a:solidFill>
-                <a:latin typeface="Cambria" pitchFamily="34" charset="0"/>
-                <a:ea typeface="Cambria" pitchFamily="34" charset="-122"/>
-                <a:cs typeface="Cambria" pitchFamily="34" charset="-120"/>
-              </a:rPr>
-              <a:t>Protsessor (CPU)</a:t>
-            </a:r>
-            <a:endParaRPr lang="en-US" sz="1550" dirty="0"/>
-          </a:p>
-        </p:txBody>
-      </p:sp>
-      <p:sp>
-        <p:nvSpPr>
-          <p:cNvPr id="8" name="Text 5"/>
-          <p:cNvSpPr/>
-          <p:nvPr/>
-        </p:nvSpPr>
-        <p:spPr>
-          <a:xfrm>
-            <a:off x="731520" y="2788920"/>
-            <a:ext cx="3108960" cy="457200"/>
-          </a:xfrm>
-          <a:prstGeom prst="rect">
-            <a:avLst/>
-          </a:prstGeom>
-          <a:noFill/>
-          <a:ln/>
-        </p:spPr>
-        <p:txBody>
-          <a:bodyPr wrap="square" rtlCol="0" anchor="t"/>
-          <a:lstStyle/>
-          <a:p>
-            <a:pPr indent="0" marL="0">
-              <a:lnSpc>
-                <a:spcPct val="102000"/>
-              </a:lnSpc>
-              <a:buNone/>
-            </a:pPr>
-            <a:r>
-              <a:rPr lang="en-US" sz="1150" dirty="0">
-                <a:solidFill>
-                  <a:srgbClr val="5B6472"/>
-                </a:solidFill>
-                <a:latin typeface="Calibri" pitchFamily="34" charset="0"/>
-                <a:ea typeface="Calibri" pitchFamily="34" charset="-122"/>
-                <a:cs typeface="Calibri" pitchFamily="34" charset="-120"/>
-              </a:rPr>
-              <a:t>Kompyuterning "miyasi" - barcha hisob-amallarni bajaradi.</a:t>
-            </a:r>
-            <a:endParaRPr lang="en-US" sz="1150" dirty="0"/>
-          </a:p>
-        </p:txBody>
-      </p:sp>
-      <p:sp>
-        <p:nvSpPr>
-          <p:cNvPr id="9" name="Shape 6"/>
-          <p:cNvSpPr/>
-          <p:nvPr/>
-        </p:nvSpPr>
-        <p:spPr>
-          <a:xfrm>
-            <a:off x="4315968" y="1325880"/>
-            <a:ext cx="3611880" cy="1993392"/>
-          </a:xfrm>
-          <a:prstGeom prst="roundRect">
-            <a:avLst>
-              <a:gd name="adj" fmla="val 4128"/>
-            </a:avLst>
-          </a:prstGeom>
-          <a:solidFill>
-            <a:srgbClr val="FFFFFF"/>
-          </a:solidFill>
-          <a:ln/>
-          <a:effectLst>
-            <a:outerShdw sx="100000" sy="100000" kx="0" ky="0" algn="bl" rotWithShape="0" blurRad="114300" dist="38100" dir="5400000">
-              <a:srgbClr val="9AA5B8">
-                <a:alpha val="28000"/>
-              </a:srgbClr>
-            </a:outerShdw>
-          </a:effectLst>
-        </p:spPr>
-      </p:sp>
-      <p:sp>
-        <p:nvSpPr>
-          <p:cNvPr id="10" name="Shape 7"/>
-          <p:cNvSpPr/>
-          <p:nvPr/>
-        </p:nvSpPr>
-        <p:spPr>
-          <a:xfrm>
-            <a:off x="4590288" y="1618488"/>
-            <a:ext cx="749808" cy="749808"/>
-          </a:xfrm>
-          <a:prstGeom prst="ellipse">
-            <a:avLst/>
-          </a:prstGeom>
-          <a:solidFill>
-            <a:srgbClr val="1FA8C9"/>
-          </a:solidFill>
-          <a:ln/>
-        </p:spPr>
-      </p:sp>
-      <p:pic>
-        <p:nvPicPr>
-          <p:cNvPr id="11" name="Image 1" descr="preencoded.png">    </p:cNvPr>
-          <p:cNvPicPr>
-            <a:picLocks noChangeAspect="1"/>
-          </p:cNvPicPr>
-          <p:nvPr/>
-        </p:nvPicPr>
-        <p:blipFill>
-          <a:blip r:embed="rId2"/>
-          <a:stretch>
-            <a:fillRect/>
-          </a:stretch>
-        </p:blipFill>
-        <p:spPr>
-          <a:xfrm>
-            <a:off x="4764024" y="1792224"/>
-            <a:ext cx="402336" cy="402336"/>
-          </a:xfrm>
-          <a:prstGeom prst="rect">
-            <a:avLst/>
-          </a:prstGeom>
-        </p:spPr>
-      </p:pic>
-      <p:sp>
-        <p:nvSpPr>
-          <p:cNvPr id="12" name="Text 8"/>
-          <p:cNvSpPr/>
-          <p:nvPr/>
-        </p:nvSpPr>
-        <p:spPr>
-          <a:xfrm>
-            <a:off x="4590288" y="2441448"/>
-            <a:ext cx="3063240" cy="411480"/>
-          </a:xfrm>
-          <a:prstGeom prst="rect">
-            <a:avLst/>
-          </a:prstGeom>
-          <a:noFill/>
-          <a:ln/>
-        </p:spPr>
-        <p:txBody>
-          <a:bodyPr wrap="square" rtlCol="0" anchor="ctr"/>
-          <a:lstStyle/>
-          <a:p>
-            <a:pPr indent="0" marL="0">
-              <a:buNone/>
-            </a:pPr>
-            <a:r>
-              <a:rPr lang="en-US" sz="1550" b="1" dirty="0">
-                <a:solidFill>
-                  <a:srgbClr val="1F2A6E"/>
-                </a:solidFill>
-                <a:latin typeface="Cambria" pitchFamily="34" charset="0"/>
-                <a:ea typeface="Cambria" pitchFamily="34" charset="-122"/>
-                <a:cs typeface="Cambria" pitchFamily="34" charset="-120"/>
-              </a:rPr>
-              <a:t>Operativ xotira (RAM)</a:t>
-            </a:r>
-            <a:endParaRPr lang="en-US" sz="1550" dirty="0"/>
-          </a:p>
-        </p:txBody>
-      </p:sp>
-      <p:sp>
-        <p:nvSpPr>
-          <p:cNvPr id="13" name="Text 9"/>
-          <p:cNvSpPr/>
-          <p:nvPr/>
-        </p:nvSpPr>
-        <p:spPr>
-          <a:xfrm>
-            <a:off x="4590288" y="2788920"/>
-            <a:ext cx="3108960" cy="457200"/>
-          </a:xfrm>
-          <a:prstGeom prst="rect">
-            <a:avLst/>
-          </a:prstGeom>
-          <a:noFill/>
-          <a:ln/>
-        </p:spPr>
-        <p:txBody>
-          <a:bodyPr wrap="square" rtlCol="0" anchor="t"/>
-          <a:lstStyle/>
-          <a:p>
-            <a:pPr indent="0" marL="0">
-              <a:lnSpc>
-                <a:spcPct val="102000"/>
-              </a:lnSpc>
-              <a:buNone/>
-            </a:pPr>
-            <a:r>
-              <a:rPr lang="en-US" sz="1150" dirty="0">
-                <a:solidFill>
-                  <a:srgbClr val="5B6472"/>
-                </a:solidFill>
-                <a:latin typeface="Calibri" pitchFamily="34" charset="0"/>
-                <a:ea typeface="Calibri" pitchFamily="34" charset="-122"/>
-                <a:cs typeface="Calibri" pitchFamily="34" charset="-120"/>
-              </a:rPr>
-              <a:t>Dasturlar ishlayotganda ma'lumotni vaqtinchalik saqlovchi tez xotira.</a:t>
-            </a:r>
-            <a:endParaRPr lang="en-US" sz="1150" dirty="0"/>
-          </a:p>
-        </p:txBody>
-      </p:sp>
-      <p:sp>
-        <p:nvSpPr>
-          <p:cNvPr id="14" name="Shape 10"/>
-          <p:cNvSpPr/>
-          <p:nvPr/>
-        </p:nvSpPr>
-        <p:spPr>
-          <a:xfrm>
-            <a:off x="8174736" y="1325880"/>
-            <a:ext cx="3611880" cy="1993392"/>
-          </a:xfrm>
-          <a:prstGeom prst="roundRect">
-            <a:avLst>
-              <a:gd name="adj" fmla="val 4128"/>
-            </a:avLst>
-          </a:prstGeom>
-          <a:solidFill>
-            <a:srgbClr val="FFFFFF"/>
-          </a:solidFill>
-          <a:ln/>
-          <a:effectLst>
-            <a:outerShdw sx="100000" sy="100000" kx="0" ky="0" algn="bl" rotWithShape="0" blurRad="114300" dist="38100" dir="5400000">
-              <a:srgbClr val="9AA5B8">
-                <a:alpha val="28000"/>
-              </a:srgbClr>
-            </a:outerShdw>
-          </a:effectLst>
-        </p:spPr>
-      </p:sp>
-      <p:sp>
-        <p:nvSpPr>
-          <p:cNvPr id="15" name="Shape 11"/>
-          <p:cNvSpPr/>
-          <p:nvPr/>
-        </p:nvSpPr>
-        <p:spPr>
-          <a:xfrm>
-            <a:off x="8449056" y="1618488"/>
-            <a:ext cx="749808" cy="749808"/>
-          </a:xfrm>
-          <a:prstGeom prst="ellipse">
-            <a:avLst/>
-          </a:prstGeom>
-          <a:solidFill>
-            <a:srgbClr val="6A2C91"/>
-          </a:solidFill>
-          <a:ln/>
-        </p:spPr>
-      </p:sp>
-      <p:pic>
-        <p:nvPicPr>
-          <p:cNvPr id="16" name="Image 2" descr="preencoded.png">    </p:cNvPr>
-          <p:cNvPicPr>
-            <a:picLocks noChangeAspect="1"/>
-          </p:cNvPicPr>
-          <p:nvPr/>
-        </p:nvPicPr>
-        <p:blipFill>
-          <a:blip r:embed="rId3"/>
-          <a:stretch>
-            <a:fillRect/>
-          </a:stretch>
-        </p:blipFill>
-        <p:spPr>
-          <a:xfrm>
-            <a:off x="8622792" y="1792224"/>
-            <a:ext cx="402336" cy="402336"/>
-          </a:xfrm>
-          <a:prstGeom prst="rect">
-            <a:avLst/>
-          </a:prstGeom>
-        </p:spPr>
-      </p:pic>
-      <p:sp>
-        <p:nvSpPr>
-          <p:cNvPr id="17" name="Text 12"/>
-          <p:cNvSpPr/>
-          <p:nvPr/>
-        </p:nvSpPr>
-        <p:spPr>
-          <a:xfrm>
-            <a:off x="8449056" y="2441448"/>
-            <a:ext cx="3063240" cy="411480"/>
-          </a:xfrm>
-          <a:prstGeom prst="rect">
-            <a:avLst/>
-          </a:prstGeom>
-          <a:noFill/>
-          <a:ln/>
-        </p:spPr>
-        <p:txBody>
-          <a:bodyPr wrap="square" rtlCol="0" anchor="ctr"/>
-          <a:lstStyle/>
-          <a:p>
-            <a:pPr indent="0" marL="0">
-              <a:buNone/>
-            </a:pPr>
-            <a:r>
-              <a:rPr lang="en-US" sz="1550" b="1" dirty="0">
-                <a:solidFill>
-                  <a:srgbClr val="1F2A6E"/>
-                </a:solidFill>
-                <a:latin typeface="Cambria" pitchFamily="34" charset="0"/>
-                <a:ea typeface="Cambria" pitchFamily="34" charset="-122"/>
-                <a:cs typeface="Cambria" pitchFamily="34" charset="-120"/>
-              </a:rPr>
-              <a:t>Ona plata</a:t>
-            </a:r>
-            <a:endParaRPr lang="en-US" sz="1550" dirty="0"/>
-          </a:p>
-        </p:txBody>
-      </p:sp>
-      <p:sp>
-        <p:nvSpPr>
-          <p:cNvPr id="18" name="Text 13"/>
-          <p:cNvSpPr/>
-          <p:nvPr/>
-        </p:nvSpPr>
-        <p:spPr>
-          <a:xfrm>
-            <a:off x="8449056" y="2788920"/>
-            <a:ext cx="3108960" cy="457200"/>
-          </a:xfrm>
-          <a:prstGeom prst="rect">
-            <a:avLst/>
-          </a:prstGeom>
-          <a:noFill/>
-          <a:ln/>
-        </p:spPr>
-        <p:txBody>
-          <a:bodyPr wrap="square" rtlCol="0" anchor="t"/>
-          <a:lstStyle/>
-          <a:p>
-            <a:pPr indent="0" marL="0">
-              <a:lnSpc>
-                <a:spcPct val="102000"/>
-              </a:lnSpc>
-              <a:buNone/>
-            </a:pPr>
-            <a:r>
-              <a:rPr lang="en-US" sz="1150" dirty="0">
-                <a:solidFill>
-                  <a:srgbClr val="5B6472"/>
-                </a:solidFill>
-                <a:latin typeface="Calibri" pitchFamily="34" charset="0"/>
-                <a:ea typeface="Calibri" pitchFamily="34" charset="-122"/>
-                <a:cs typeface="Calibri" pitchFamily="34" charset="-120"/>
-              </a:rPr>
-              <a:t>Barcha qurilmalarni o'zaro bog'lovchi asosiy plata.</a:t>
-            </a:r>
-            <a:endParaRPr lang="en-US" sz="1150" dirty="0"/>
-          </a:p>
-        </p:txBody>
-      </p:sp>
-      <p:sp>
-        <p:nvSpPr>
-          <p:cNvPr id="19" name="Shape 14"/>
-          <p:cNvSpPr/>
-          <p:nvPr/>
-        </p:nvSpPr>
-        <p:spPr>
-          <a:xfrm>
-            <a:off x="457200" y="3575304"/>
-            <a:ext cx="3611880" cy="1993392"/>
-          </a:xfrm>
-          <a:prstGeom prst="roundRect">
-            <a:avLst>
-              <a:gd name="adj" fmla="val 4128"/>
-            </a:avLst>
-          </a:prstGeom>
-          <a:solidFill>
-            <a:srgbClr val="FFFFFF"/>
-          </a:solidFill>
-          <a:ln/>
-          <a:effectLst>
-            <a:outerShdw sx="100000" sy="100000" kx="0" ky="0" algn="bl" rotWithShape="0" blurRad="114300" dist="38100" dir="5400000">
-              <a:srgbClr val="9AA5B8">
-                <a:alpha val="28000"/>
-              </a:srgbClr>
-            </a:outerShdw>
-          </a:effectLst>
-        </p:spPr>
-      </p:sp>
-      <p:sp>
-        <p:nvSpPr>
-          <p:cNvPr id="20" name="Shape 15"/>
-          <p:cNvSpPr/>
-          <p:nvPr/>
-        </p:nvSpPr>
-        <p:spPr>
-          <a:xfrm>
-            <a:off x="731520" y="3867912"/>
-            <a:ext cx="749808" cy="749808"/>
-          </a:xfrm>
-          <a:prstGeom prst="ellipse">
-            <a:avLst/>
-          </a:prstGeom>
-          <a:solidFill>
-            <a:srgbClr val="27AE60"/>
-          </a:solidFill>
-          <a:ln/>
-        </p:spPr>
-      </p:sp>
-      <p:pic>
-        <p:nvPicPr>
-          <p:cNvPr id="21" name="Image 3" descr="preencoded.png">    </p:cNvPr>
-          <p:cNvPicPr>
-            <a:picLocks noChangeAspect="1"/>
-          </p:cNvPicPr>
-          <p:nvPr/>
-        </p:nvPicPr>
-        <p:blipFill>
-          <a:blip r:embed="rId4"/>
-          <a:stretch>
-            <a:fillRect/>
-          </a:stretch>
-        </p:blipFill>
-        <p:spPr>
-          <a:xfrm>
-            <a:off x="905256" y="4041648"/>
-            <a:ext cx="402336" cy="402336"/>
-          </a:xfrm>
-          <a:prstGeom prst="rect">
-            <a:avLst/>
-          </a:prstGeom>
-        </p:spPr>
-      </p:pic>
-      <p:sp>
-        <p:nvSpPr>
-          <p:cNvPr id="22" name="Text 16"/>
-          <p:cNvSpPr/>
-          <p:nvPr/>
-        </p:nvSpPr>
-        <p:spPr>
-          <a:xfrm>
-            <a:off x="731520" y="4690872"/>
-            <a:ext cx="3063240" cy="411480"/>
-          </a:xfrm>
-          <a:prstGeom prst="rect">
-            <a:avLst/>
-          </a:prstGeom>
-          <a:noFill/>
-          <a:ln/>
-        </p:spPr>
-        <p:txBody>
-          <a:bodyPr wrap="square" rtlCol="0" anchor="ctr"/>
-          <a:lstStyle/>
-          <a:p>
-            <a:pPr indent="0" marL="0">
-              <a:buNone/>
-            </a:pPr>
-            <a:r>
-              <a:rPr lang="en-US" sz="1550" b="1" dirty="0">
-                <a:solidFill>
-                  <a:srgbClr val="1F2A6E"/>
-                </a:solidFill>
-                <a:latin typeface="Cambria" pitchFamily="34" charset="0"/>
-                <a:ea typeface="Cambria" pitchFamily="34" charset="-122"/>
-                <a:cs typeface="Cambria" pitchFamily="34" charset="-120"/>
-              </a:rPr>
-              <a:t>Qattiq disk (HDD/SSD)</a:t>
-            </a:r>
-            <a:endParaRPr lang="en-US" sz="1550" dirty="0"/>
-          </a:p>
-        </p:txBody>
-      </p:sp>
-      <p:sp>
-        <p:nvSpPr>
-          <p:cNvPr id="23" name="Text 17"/>
-          <p:cNvSpPr/>
-          <p:nvPr/>
-        </p:nvSpPr>
-        <p:spPr>
-          <a:xfrm>
-            <a:off x="731520" y="5038344"/>
-            <a:ext cx="3108960" cy="457200"/>
-          </a:xfrm>
-          <a:prstGeom prst="rect">
-            <a:avLst/>
-          </a:prstGeom>
-          <a:noFill/>
-          <a:ln/>
-        </p:spPr>
-        <p:txBody>
-          <a:bodyPr wrap="square" rtlCol="0" anchor="t"/>
-          <a:lstStyle/>
-          <a:p>
-            <a:pPr indent="0" marL="0">
-              <a:lnSpc>
-                <a:spcPct val="102000"/>
-              </a:lnSpc>
-              <a:buNone/>
-            </a:pPr>
-            <a:r>
-              <a:rPr lang="en-US" sz="1150" dirty="0">
-                <a:solidFill>
-                  <a:srgbClr val="5B6472"/>
-                </a:solidFill>
-                <a:latin typeface="Calibri" pitchFamily="34" charset="0"/>
-                <a:ea typeface="Calibri" pitchFamily="34" charset="-122"/>
-                <a:cs typeface="Calibri" pitchFamily="34" charset="-120"/>
-              </a:rPr>
-              <a:t>Fayl va dasturlarni doimiy saqlaydigan xotira.</a:t>
-            </a:r>
-            <a:endParaRPr lang="en-US" sz="1150" dirty="0"/>
-          </a:p>
-        </p:txBody>
-      </p:sp>
-      <p:sp>
-        <p:nvSpPr>
-          <p:cNvPr id="24" name="Shape 18"/>
-          <p:cNvSpPr/>
-          <p:nvPr/>
-        </p:nvSpPr>
-        <p:spPr>
-          <a:xfrm>
-            <a:off x="4315968" y="3575304"/>
-            <a:ext cx="3611880" cy="1993392"/>
-          </a:xfrm>
-          <a:prstGeom prst="roundRect">
-            <a:avLst>
-              <a:gd name="adj" fmla="val 4128"/>
-            </a:avLst>
-          </a:prstGeom>
-          <a:solidFill>
-            <a:srgbClr val="FFFFFF"/>
-          </a:solidFill>
-          <a:ln/>
-          <a:effectLst>
-            <a:outerShdw sx="100000" sy="100000" kx="0" ky="0" algn="bl" rotWithShape="0" blurRad="114300" dist="38100" dir="5400000">
-              <a:srgbClr val="9AA5B8">
-                <a:alpha val="28000"/>
-              </a:srgbClr>
-            </a:outerShdw>
-          </a:effectLst>
-        </p:spPr>
-      </p:sp>
-      <p:sp>
-        <p:nvSpPr>
-          <p:cNvPr id="25" name="Shape 19"/>
-          <p:cNvSpPr/>
-          <p:nvPr/>
-        </p:nvSpPr>
-        <p:spPr>
-          <a:xfrm>
-            <a:off x="4590288" y="3867912"/>
-            <a:ext cx="749808" cy="749808"/>
-          </a:xfrm>
-          <a:prstGeom prst="ellipse">
-            <a:avLst/>
-          </a:prstGeom>
-          <a:solidFill>
-            <a:srgbClr val="E67E22"/>
-          </a:solidFill>
-          <a:ln/>
-        </p:spPr>
-      </p:sp>
-      <p:pic>
-        <p:nvPicPr>
-          <p:cNvPr id="26" name="Image 4" descr="preencoded.png">    </p:cNvPr>
-          <p:cNvPicPr>
-            <a:picLocks noChangeAspect="1"/>
-          </p:cNvPicPr>
-          <p:nvPr/>
-        </p:nvPicPr>
-        <p:blipFill>
-          <a:blip r:embed="rId5"/>
-          <a:stretch>
-            <a:fillRect/>
-          </a:stretch>
-        </p:blipFill>
-        <p:spPr>
-          <a:xfrm>
-            <a:off x="4764024" y="4041648"/>
-            <a:ext cx="402336" cy="402336"/>
-          </a:xfrm>
-          <a:prstGeom prst="rect">
-            <a:avLst/>
-          </a:prstGeom>
-        </p:spPr>
-      </p:pic>
-      <p:sp>
-        <p:nvSpPr>
-          <p:cNvPr id="27" name="Text 20"/>
-          <p:cNvSpPr/>
-          <p:nvPr/>
-        </p:nvSpPr>
-        <p:spPr>
-          <a:xfrm>
-            <a:off x="4590288" y="4690872"/>
-            <a:ext cx="3063240" cy="411480"/>
-          </a:xfrm>
-          <a:prstGeom prst="rect">
-            <a:avLst/>
-          </a:prstGeom>
-          <a:noFill/>
-          <a:ln/>
-        </p:spPr>
-        <p:txBody>
-          <a:bodyPr wrap="square" rtlCol="0" anchor="ctr"/>
-          <a:lstStyle/>
-          <a:p>
-            <a:pPr indent="0" marL="0">
-              <a:buNone/>
-            </a:pPr>
-            <a:r>
-              <a:rPr lang="en-US" sz="1550" b="1" dirty="0">
-                <a:solidFill>
-                  <a:srgbClr val="1F2A6E"/>
-                </a:solidFill>
-                <a:latin typeface="Cambria" pitchFamily="34" charset="0"/>
-                <a:ea typeface="Cambria" pitchFamily="34" charset="-122"/>
-                <a:cs typeface="Cambria" pitchFamily="34" charset="-120"/>
-              </a:rPr>
-              <a:t>Video karta (GPU)</a:t>
-            </a:r>
-            <a:endParaRPr lang="en-US" sz="1550" dirty="0"/>
-          </a:p>
-        </p:txBody>
-      </p:sp>
-      <p:sp>
-        <p:nvSpPr>
-          <p:cNvPr id="28" name="Text 21"/>
-          <p:cNvSpPr/>
-          <p:nvPr/>
-        </p:nvSpPr>
-        <p:spPr>
-          <a:xfrm>
-            <a:off x="4590288" y="5038344"/>
-            <a:ext cx="3108960" cy="457200"/>
-          </a:xfrm>
-          <a:prstGeom prst="rect">
-            <a:avLst/>
-          </a:prstGeom>
-          <a:noFill/>
-          <a:ln/>
-        </p:spPr>
-        <p:txBody>
-          <a:bodyPr wrap="square" rtlCol="0" anchor="t"/>
-          <a:lstStyle/>
-          <a:p>
-            <a:pPr indent="0" marL="0">
-              <a:lnSpc>
-                <a:spcPct val="102000"/>
-              </a:lnSpc>
-              <a:buNone/>
-            </a:pPr>
-            <a:r>
-              <a:rPr lang="en-US" sz="1150" dirty="0">
-                <a:solidFill>
-                  <a:srgbClr val="5B6472"/>
-                </a:solidFill>
-                <a:latin typeface="Calibri" pitchFamily="34" charset="0"/>
-                <a:ea typeface="Calibri" pitchFamily="34" charset="-122"/>
-                <a:cs typeface="Calibri" pitchFamily="34" charset="-120"/>
-              </a:rPr>
-              <a:t>Tasvir va grafikani qayta ishlab monitorga uzatadi.</a:t>
-            </a:r>
-            <a:endParaRPr lang="en-US" sz="1150" dirty="0"/>
-          </a:p>
-        </p:txBody>
-      </p:sp>
-      <p:sp>
-        <p:nvSpPr>
-          <p:cNvPr id="29" name="Shape 22"/>
-          <p:cNvSpPr/>
-          <p:nvPr/>
-        </p:nvSpPr>
-        <p:spPr>
-          <a:xfrm>
-            <a:off x="8174736" y="3575304"/>
-            <a:ext cx="3611880" cy="1993392"/>
-          </a:xfrm>
-          <a:prstGeom prst="roundRect">
-            <a:avLst>
-              <a:gd name="adj" fmla="val 4128"/>
-            </a:avLst>
-          </a:prstGeom>
-          <a:solidFill>
-            <a:srgbClr val="FFFFFF"/>
-          </a:solidFill>
-          <a:ln/>
-          <a:effectLst>
-            <a:outerShdw sx="100000" sy="100000" kx="0" ky="0" algn="bl" rotWithShape="0" blurRad="114300" dist="38100" dir="5400000">
-              <a:srgbClr val="9AA5B8">
-                <a:alpha val="28000"/>
-              </a:srgbClr>
-            </a:outerShdw>
-          </a:effectLst>
-        </p:spPr>
-      </p:sp>
-      <p:sp>
-        <p:nvSpPr>
-          <p:cNvPr id="30" name="Shape 23"/>
-          <p:cNvSpPr/>
-          <p:nvPr/>
-        </p:nvSpPr>
-        <p:spPr>
-          <a:xfrm>
-            <a:off x="8449056" y="3867912"/>
-            <a:ext cx="749808" cy="749808"/>
-          </a:xfrm>
-          <a:prstGeom prst="ellipse">
-            <a:avLst/>
-          </a:prstGeom>
-          <a:solidFill>
-            <a:srgbClr val="C0392B"/>
-          </a:solidFill>
-          <a:ln/>
-        </p:spPr>
-      </p:sp>
-      <p:pic>
-        <p:nvPicPr>
-          <p:cNvPr id="31" name="Image 5" descr="preencoded.png">    </p:cNvPr>
-          <p:cNvPicPr>
-            <a:picLocks noChangeAspect="1"/>
-          </p:cNvPicPr>
-          <p:nvPr/>
-        </p:nvPicPr>
-        <p:blipFill>
-          <a:blip r:embed="rId6"/>
-          <a:stretch>
-            <a:fillRect/>
-          </a:stretch>
-        </p:blipFill>
-        <p:spPr>
-          <a:xfrm>
-            <a:off x="8622792" y="4041648"/>
-            <a:ext cx="402336" cy="402336"/>
-          </a:xfrm>
-          <a:prstGeom prst="rect">
-            <a:avLst/>
-          </a:prstGeom>
-        </p:spPr>
-      </p:pic>
-      <p:sp>
-        <p:nvSpPr>
-          <p:cNvPr id="32" name="Text 24"/>
-          <p:cNvSpPr/>
-          <p:nvPr/>
-        </p:nvSpPr>
-        <p:spPr>
-          <a:xfrm>
-            <a:off x="8449056" y="4690872"/>
-            <a:ext cx="3063240" cy="411480"/>
-          </a:xfrm>
-          <a:prstGeom prst="rect">
-            <a:avLst/>
-          </a:prstGeom>
-          <a:noFill/>
-          <a:ln/>
-        </p:spPr>
-        <p:txBody>
-          <a:bodyPr wrap="square" rtlCol="0" anchor="ctr"/>
-          <a:lstStyle/>
-          <a:p>
-            <a:pPr indent="0" marL="0">
-              <a:buNone/>
-            </a:pPr>
-            <a:r>
-              <a:rPr lang="en-US" sz="1550" b="1" dirty="0">
-                <a:solidFill>
-                  <a:srgbClr val="1F2A6E"/>
-                </a:solidFill>
-                <a:latin typeface="Cambria" pitchFamily="34" charset="0"/>
-                <a:ea typeface="Cambria" pitchFamily="34" charset="-122"/>
-                <a:cs typeface="Cambria" pitchFamily="34" charset="-120"/>
-              </a:rPr>
-              <a:t>Blok pitaniya</a:t>
-            </a:r>
-            <a:endParaRPr lang="en-US" sz="1550" dirty="0"/>
-          </a:p>
-        </p:txBody>
-      </p:sp>
-      <p:sp>
-        <p:nvSpPr>
-          <p:cNvPr id="33" name="Text 25"/>
-          <p:cNvSpPr/>
-          <p:nvPr/>
-        </p:nvSpPr>
-        <p:spPr>
-          <a:xfrm>
-            <a:off x="8449056" y="5038344"/>
-            <a:ext cx="3108960" cy="457200"/>
-          </a:xfrm>
-          <a:prstGeom prst="rect">
-            <a:avLst/>
-          </a:prstGeom>
-          <a:noFill/>
-          <a:ln/>
-        </p:spPr>
-        <p:txBody>
-          <a:bodyPr wrap="square" rtlCol="0" anchor="t"/>
-          <a:lstStyle/>
-          <a:p>
-            <a:pPr indent="0" marL="0">
-              <a:lnSpc>
-                <a:spcPct val="102000"/>
-              </a:lnSpc>
-              <a:buNone/>
-            </a:pPr>
-            <a:r>
-              <a:rPr lang="en-US" sz="1150" dirty="0">
-                <a:solidFill>
-                  <a:srgbClr val="5B6472"/>
-                </a:solidFill>
-                <a:latin typeface="Calibri" pitchFamily="34" charset="0"/>
-                <a:ea typeface="Calibri" pitchFamily="34" charset="-122"/>
-                <a:cs typeface="Calibri" pitchFamily="34" charset="-120"/>
-              </a:rPr>
-              <a:t>Elektr quvvatini qurilmalarga taqsimlaydi.</a:t>
-            </a:r>
-            <a:endParaRPr lang="en-US" sz="1150" dirty="0"/>
-          </a:p>
-        </p:txBody>
-      </p:sp>
-      <p:pic>
-        <p:nvPicPr>
-          <p:cNvPr id="34" name="Image 6" descr="/sessions/ecstatic-admiring-tesla/mnt/outputs/assets/logo.png">    </p:cNvPr>
-          <p:cNvPicPr>
-            <a:picLocks noChangeAspect="1"/>
-          </p:cNvPicPr>
-          <p:nvPr/>
-        </p:nvPicPr>
-        <p:blipFill>
-          <a:blip r:embed="rId7"/>
-          <a:stretch>
-            <a:fillRect/>
-          </a:stretch>
-        </p:blipFill>
-        <p:spPr>
-          <a:xfrm>
-            <a:off x="457200" y="6291072"/>
-            <a:ext cx="1051560" cy="493776"/>
-          </a:xfrm>
-          <a:prstGeom prst="rect">
-            <a:avLst/>
-          </a:prstGeom>
-        </p:spPr>
-      </p:pic>
-      <p:sp>
-        <p:nvSpPr>
-          <p:cNvPr id="35" name="Text 26"/>
-          <p:cNvSpPr/>
-          <p:nvPr/>
-        </p:nvSpPr>
-        <p:spPr>
-          <a:xfrm>
-            <a:off x="1645920" y="6327648"/>
-            <a:ext cx="7315200" cy="365760"/>
-          </a:xfrm>
-          <a:prstGeom prst="rect">
-            <a:avLst/>
-          </a:prstGeom>
-          <a:noFill/>
-          <a:ln/>
-        </p:spPr>
-        <p:txBody>
-          <a:bodyPr wrap="square" rtlCol="0" anchor="ctr"/>
-          <a:lstStyle/>
-          <a:p>
-            <a:pPr indent="0" marL="0">
-              <a:buNone/>
-            </a:pPr>
-            <a:r>
-              <a:rPr lang="en-US" sz="900" dirty="0">
-                <a:solidFill>
-                  <a:srgbClr val="5B6472"/>
-                </a:solidFill>
-                <a:latin typeface="Calibri" pitchFamily="34" charset="0"/>
-                <a:ea typeface="Calibri" pitchFamily="34" charset="-122"/>
-                <a:cs typeface="Calibri" pitchFamily="34" charset="-120"/>
-              </a:rPr>
-              <a:t>Yoshlar Axborot Texnologiyalari Markazi</a:t>
-            </a:r>
-            <a:endParaRPr lang="en-US" sz="900" dirty="0"/>
-          </a:p>
-        </p:txBody>
-      </p:sp>
-      <p:sp>
-        <p:nvSpPr>
-          <p:cNvPr id="36" name="Text 27"/>
-          <p:cNvSpPr/>
-          <p:nvPr/>
-        </p:nvSpPr>
-        <p:spPr>
-          <a:xfrm>
-            <a:off x="9997135" y="6327648"/>
-            <a:ext cx="1737360" cy="365760"/>
-          </a:xfrm>
-          <a:prstGeom prst="rect">
-            <a:avLst/>
-          </a:prstGeom>
-          <a:noFill/>
-          <a:ln/>
-        </p:spPr>
-        <p:txBody>
-          <a:bodyPr wrap="square" rtlCol="0" anchor="ctr"/>
-          <a:lstStyle/>
-          <a:p>
-            <a:pPr algn="r" indent="0" marL="0">
-              <a:buNone/>
-            </a:pPr>
-            <a:r>
-              <a:rPr lang="en-US" sz="900" dirty="0">
-                <a:solidFill>
-                  <a:srgbClr val="5B6472"/>
-                </a:solidFill>
-                <a:latin typeface="Calibri" pitchFamily="34" charset="0"/>
-                <a:ea typeface="Calibri" pitchFamily="34" charset="-122"/>
-                <a:cs typeface="Calibri" pitchFamily="34" charset="-120"/>
-              </a:rPr>
-              <a:t>01-dars  •  Ichki qurilmalar</a:t>
-            </a:r>
-            <a:endParaRPr lang="en-US" sz="900" dirty="0"/>
-          </a:p>
-        </p:txBody>
-      </p:sp>
-    </p:spTree>
-  </p:cSld>
-  <p:clrMapOvr>
-    <a:masterClrMapping/>
-  </p:clrMapOvr>
-</p:sld>
-</file>
-
-<file path=ppt/slides/slide5.xml><?xml version="1.0" encoding="utf-8"?>
-<p:sld xmlns:a="http://schemas.openxmlformats.org/drawingml/2006/main" xmlns:r="http://schemas.openxmlformats.org/officeDocument/2006/relationships" xmlns:p="http://schemas.openxmlformats.org/presentationml/2006/main">
-  <p:cSld name="Slide 5">
     <p:bg>
       <p:bgPr>
         <a:solidFill>
@@ -4906,7 +3292,7 @@
             </a:avLst>
           </a:prstGeom>
           <a:solidFill>
-            <a:srgbClr val="E67E22"/>
+            <a:srgbClr val="6A2C91"/>
           </a:solidFill>
           <a:ln/>
         </p:spPr>
@@ -4920,7 +3306,7 @@
         <p:spPr>
           <a:xfrm>
             <a:off x="713232" y="365760"/>
-            <a:ext cx="10058400" cy="548640"/>
+            <a:ext cx="10972800" cy="548640"/>
           </a:xfrm>
           <a:prstGeom prst="rect">
             <a:avLst/>
@@ -4936,7 +3322,7 @@
               <a:buNone/>
             </a:pPr>
             <a:r>
-              <a:rPr lang="en-US" sz="2700" b="1" dirty="0">
+              <a:rPr lang="en-US" sz="2600" b="1" dirty="0">
                 <a:solidFill>
                   <a:srgbClr val="1F2A6E"/>
                 </a:solidFill>
@@ -4944,9 +3330,9 @@
                 <a:ea typeface="Cambria" pitchFamily="34" charset="-122"/>
                 <a:cs typeface="Cambria" pitchFamily="34" charset="-120"/>
               </a:rPr>
-              <a:t>Kirish va chiqish qurilmalari</a:t>
-            </a:r>
-            <a:endParaRPr lang="en-US" sz="2700" dirty="0"/>
+              <a:t>Asosiy atamalar</a:t>
+            </a:r>
+            <a:endParaRPr lang="en-US" sz="2600" dirty="0"/>
           </a:p>
         </p:txBody>
       </p:sp>
@@ -4958,12 +3344,12 @@
         </p:nvSpPr>
         <p:spPr>
           <a:xfrm>
-            <a:off x="457200" y="1325880"/>
-            <a:ext cx="5349240" cy="4297680"/>
+            <a:off x="457200" y="1371600"/>
+            <a:ext cx="11247120" cy="749808"/>
           </a:xfrm>
           <a:prstGeom prst="roundRect">
             <a:avLst>
-              <a:gd name="adj" fmla="val 2128"/>
+              <a:gd name="adj" fmla="val 8537"/>
             </a:avLst>
           </a:prstGeom>
           <a:solidFill>
@@ -4980,21 +3366,348 @@
         </p:nvSpPr>
         <p:spPr>
           <a:xfrm>
-            <a:off x="777240" y="1645920"/>
-            <a:ext cx="731520" cy="731520"/>
+            <a:off x="658368" y="1591056"/>
+            <a:ext cx="310896" cy="310896"/>
           </a:xfrm>
           <a:prstGeom prst="ellipse">
             <a:avLst/>
           </a:prstGeom>
           <a:solidFill>
+            <a:srgbClr val="E91E8C"/>
+          </a:solidFill>
+          <a:ln/>
+        </p:spPr>
+      </p:sp>
+      <p:sp>
+        <p:nvSpPr>
+          <p:cNvPr id="6" name="Text 4"/>
+          <p:cNvSpPr/>
+          <p:nvPr/>
+        </p:nvSpPr>
+        <p:spPr>
+          <a:xfrm>
+            <a:off x="1143000" y="1371600"/>
+            <a:ext cx="3291840" cy="749808"/>
+          </a:xfrm>
+          <a:prstGeom prst="rect">
+            <a:avLst/>
+          </a:prstGeom>
+          <a:noFill/>
+          <a:ln/>
+        </p:spPr>
+        <p:txBody>
+          <a:bodyPr wrap="square" rtlCol="0" anchor="ctr"/>
+          <a:lstStyle/>
+          <a:p>
+            <a:pPr indent="0" marL="0">
+              <a:buNone/>
+            </a:pPr>
+            <a:r>
+              <a:rPr lang="en-US" sz="1350" b="1" dirty="0">
+                <a:solidFill>
+                  <a:srgbClr val="1F2A6E"/>
+                </a:solidFill>
+                <a:latin typeface="Cambria" pitchFamily="34" charset="0"/>
+                <a:ea typeface="Cambria" pitchFamily="34" charset="-122"/>
+                <a:cs typeface="Cambria" pitchFamily="34" charset="-120"/>
+              </a:rPr>
+              <a:t>Hardware</a:t>
+            </a:r>
+            <a:endParaRPr lang="en-US" sz="1350" dirty="0"/>
+          </a:p>
+        </p:txBody>
+      </p:sp>
+      <p:sp>
+        <p:nvSpPr>
+          <p:cNvPr id="7" name="Text 5"/>
+          <p:cNvSpPr/>
+          <p:nvPr/>
+        </p:nvSpPr>
+        <p:spPr>
+          <a:xfrm>
+            <a:off x="4572000" y="1371600"/>
+            <a:ext cx="6949440" cy="749808"/>
+          </a:xfrm>
+          <a:prstGeom prst="rect">
+            <a:avLst/>
+          </a:prstGeom>
+          <a:noFill/>
+          <a:ln/>
+        </p:spPr>
+        <p:txBody>
+          <a:bodyPr wrap="square" rtlCol="0" anchor="ctr"/>
+          <a:lstStyle/>
+          <a:p>
+            <a:pPr indent="0" marL="0">
+              <a:lnSpc>
+                <a:spcPct val="100000"/>
+              </a:lnSpc>
+              <a:buNone/>
+            </a:pPr>
+            <a:r>
+              <a:rPr lang="en-US" sz="1250" dirty="0">
+                <a:solidFill>
+                  <a:srgbClr val="1C2333"/>
+                </a:solidFill>
+                <a:latin typeface="Calibri" pitchFamily="34" charset="0"/>
+                <a:ea typeface="Calibri" pitchFamily="34" charset="-122"/>
+                <a:cs typeface="Calibri" pitchFamily="34" charset="-120"/>
+              </a:rPr>
+              <a:t>Kompyuterning barcha jismoniy qurilmalari yig'indisi.</a:t>
+            </a:r>
+            <a:endParaRPr lang="en-US" sz="1250" dirty="0"/>
+          </a:p>
+        </p:txBody>
+      </p:sp>
+      <p:sp>
+        <p:nvSpPr>
+          <p:cNvPr id="8" name="Shape 6"/>
+          <p:cNvSpPr/>
+          <p:nvPr/>
+        </p:nvSpPr>
+        <p:spPr>
+          <a:xfrm>
+            <a:off x="457200" y="2240280"/>
+            <a:ext cx="11247120" cy="749808"/>
+          </a:xfrm>
+          <a:prstGeom prst="roundRect">
+            <a:avLst>
+              <a:gd name="adj" fmla="val 8537"/>
+            </a:avLst>
+          </a:prstGeom>
+          <a:solidFill>
+            <a:srgbClr val="F4F6FB"/>
+          </a:solidFill>
+          <a:ln/>
+        </p:spPr>
+      </p:sp>
+      <p:sp>
+        <p:nvSpPr>
+          <p:cNvPr id="9" name="Shape 7"/>
+          <p:cNvSpPr/>
+          <p:nvPr/>
+        </p:nvSpPr>
+        <p:spPr>
+          <a:xfrm>
+            <a:off x="658368" y="2459736"/>
+            <a:ext cx="310896" cy="310896"/>
+          </a:xfrm>
+          <a:prstGeom prst="ellipse">
+            <a:avLst/>
+          </a:prstGeom>
+          <a:solidFill>
+            <a:srgbClr val="1FA8C9"/>
+          </a:solidFill>
+          <a:ln/>
+        </p:spPr>
+      </p:sp>
+      <p:sp>
+        <p:nvSpPr>
+          <p:cNvPr id="10" name="Text 8"/>
+          <p:cNvSpPr/>
+          <p:nvPr/>
+        </p:nvSpPr>
+        <p:spPr>
+          <a:xfrm>
+            <a:off x="1143000" y="2240280"/>
+            <a:ext cx="3291840" cy="749808"/>
+          </a:xfrm>
+          <a:prstGeom prst="rect">
+            <a:avLst/>
+          </a:prstGeom>
+          <a:noFill/>
+          <a:ln/>
+        </p:spPr>
+        <p:txBody>
+          <a:bodyPr wrap="square" rtlCol="0" anchor="ctr"/>
+          <a:lstStyle/>
+          <a:p>
+            <a:pPr indent="0" marL="0">
+              <a:buNone/>
+            </a:pPr>
+            <a:r>
+              <a:rPr lang="en-US" sz="1350" b="1" dirty="0">
+                <a:solidFill>
+                  <a:srgbClr val="1F2A6E"/>
+                </a:solidFill>
+                <a:latin typeface="Cambria" pitchFamily="34" charset="0"/>
+                <a:ea typeface="Cambria" pitchFamily="34" charset="-122"/>
+                <a:cs typeface="Cambria" pitchFamily="34" charset="-120"/>
+              </a:rPr>
+              <a:t>CPU / RAM</a:t>
+            </a:r>
+            <a:endParaRPr lang="en-US" sz="1350" dirty="0"/>
+          </a:p>
+        </p:txBody>
+      </p:sp>
+      <p:sp>
+        <p:nvSpPr>
+          <p:cNvPr id="11" name="Text 9"/>
+          <p:cNvSpPr/>
+          <p:nvPr/>
+        </p:nvSpPr>
+        <p:spPr>
+          <a:xfrm>
+            <a:off x="4572000" y="2240280"/>
+            <a:ext cx="6949440" cy="749808"/>
+          </a:xfrm>
+          <a:prstGeom prst="rect">
+            <a:avLst/>
+          </a:prstGeom>
+          <a:noFill/>
+          <a:ln/>
+        </p:spPr>
+        <p:txBody>
+          <a:bodyPr wrap="square" rtlCol="0" anchor="ctr"/>
+          <a:lstStyle/>
+          <a:p>
+            <a:pPr indent="0" marL="0">
+              <a:lnSpc>
+                <a:spcPct val="100000"/>
+              </a:lnSpc>
+              <a:buNone/>
+            </a:pPr>
+            <a:r>
+              <a:rPr lang="en-US" sz="1250" dirty="0">
+                <a:solidFill>
+                  <a:srgbClr val="1C2333"/>
+                </a:solidFill>
+                <a:latin typeface="Calibri" pitchFamily="34" charset="0"/>
+                <a:ea typeface="Calibri" pitchFamily="34" charset="-122"/>
+                <a:cs typeface="Calibri" pitchFamily="34" charset="-120"/>
+              </a:rPr>
+              <a:t>Markaziy protsessor va operativ xotira — eng asosiy ichki qismlar.</a:t>
+            </a:r>
+            <a:endParaRPr lang="en-US" sz="1250" dirty="0"/>
+          </a:p>
+        </p:txBody>
+      </p:sp>
+      <p:sp>
+        <p:nvSpPr>
+          <p:cNvPr id="12" name="Shape 10"/>
+          <p:cNvSpPr/>
+          <p:nvPr/>
+        </p:nvSpPr>
+        <p:spPr>
+          <a:xfrm>
+            <a:off x="457200" y="3108960"/>
+            <a:ext cx="11247120" cy="749808"/>
+          </a:xfrm>
+          <a:prstGeom prst="roundRect">
+            <a:avLst>
+              <a:gd name="adj" fmla="val 8537"/>
+            </a:avLst>
+          </a:prstGeom>
+          <a:solidFill>
+            <a:srgbClr val="F4F6FB"/>
+          </a:solidFill>
+          <a:ln/>
+        </p:spPr>
+      </p:sp>
+      <p:sp>
+        <p:nvSpPr>
+          <p:cNvPr id="13" name="Shape 11"/>
+          <p:cNvSpPr/>
+          <p:nvPr/>
+        </p:nvSpPr>
+        <p:spPr>
+          <a:xfrm>
+            <a:off x="658368" y="3328416"/>
+            <a:ext cx="310896" cy="310896"/>
+          </a:xfrm>
+          <a:prstGeom prst="ellipse">
+            <a:avLst/>
+          </a:prstGeom>
+          <a:solidFill>
             <a:srgbClr val="27AE60"/>
           </a:solidFill>
           <a:ln/>
         </p:spPr>
+      </p:sp>
+      <p:sp>
+        <p:nvSpPr>
+          <p:cNvPr id="14" name="Text 12"/>
+          <p:cNvSpPr/>
+          <p:nvPr/>
+        </p:nvSpPr>
+        <p:spPr>
+          <a:xfrm>
+            <a:off x="1143000" y="3108960"/>
+            <a:ext cx="3291840" cy="749808"/>
+          </a:xfrm>
+          <a:prstGeom prst="rect">
+            <a:avLst/>
+          </a:prstGeom>
+          <a:noFill/>
+          <a:ln/>
+        </p:spPr>
+        <p:txBody>
+          <a:bodyPr wrap="square" rtlCol="0" anchor="ctr"/>
+          <a:lstStyle/>
+          <a:p>
+            <a:pPr indent="0" marL="0">
+              <a:buNone/>
+            </a:pPr>
+            <a:r>
+              <a:rPr lang="en-US" sz="1350" b="1" dirty="0">
+                <a:solidFill>
+                  <a:srgbClr val="1F2A6E"/>
+                </a:solidFill>
+                <a:latin typeface="Cambria" pitchFamily="34" charset="0"/>
+                <a:ea typeface="Cambria" pitchFamily="34" charset="-122"/>
+                <a:cs typeface="Cambria" pitchFamily="34" charset="-120"/>
+              </a:rPr>
+              <a:t>Bit va Bayt</a:t>
+            </a:r>
+            <a:endParaRPr lang="en-US" sz="1350" dirty="0"/>
+          </a:p>
+        </p:txBody>
+      </p:sp>
+      <p:sp>
+        <p:nvSpPr>
+          <p:cNvPr id="15" name="Text 13"/>
+          <p:cNvSpPr/>
+          <p:nvPr/>
+        </p:nvSpPr>
+        <p:spPr>
+          <a:xfrm>
+            <a:off x="4572000" y="3108960"/>
+            <a:ext cx="6949440" cy="749808"/>
+          </a:xfrm>
+          <a:prstGeom prst="rect">
+            <a:avLst/>
+          </a:prstGeom>
+          <a:noFill/>
+          <a:ln/>
+        </p:spPr>
+        <p:txBody>
+          <a:bodyPr wrap="square" rtlCol="0" anchor="ctr"/>
+          <a:lstStyle/>
+          <a:p>
+            <a:pPr indent="0" marL="0">
+              <a:lnSpc>
+                <a:spcPct val="100000"/>
+              </a:lnSpc>
+              <a:buNone/>
+            </a:pPr>
+            <a:r>
+              <a:rPr lang="en-US" sz="1250" dirty="0">
+                <a:solidFill>
+                  <a:srgbClr val="1C2333"/>
+                </a:solidFill>
+                <a:latin typeface="Calibri" pitchFamily="34" charset="0"/>
+                <a:ea typeface="Calibri" pitchFamily="34" charset="-122"/>
+                <a:cs typeface="Calibri" pitchFamily="34" charset="-120"/>
+              </a:rPr>
+              <a:t>Ma'lumot o'lchov birliklari: 1 bayt = 8 bit.</a:t>
+            </a:r>
+            <a:endParaRPr lang="en-US" sz="1250" dirty="0"/>
+          </a:p>
+        </p:txBody>
       </p:sp>
       <p:pic>
         <p:nvPicPr>
-          <p:cNvPr id="6" name="Image 0" descr="preencoded.png">    </p:cNvPr>
+          <p:cNvPr id="16" name="Image 0" descr="/sessions/ecstatic-admiring-tesla/mnt/outputs/assets/logo.png">    </p:cNvPr>
           <p:cNvPicPr>
             <a:picLocks noChangeAspect="1"/>
           </p:cNvPicPr>
@@ -5008,8 +3721,8 @@
         </p:blipFill>
         <p:spPr>
           <a:xfrm>
-            <a:off x="941832" y="1810512"/>
-            <a:ext cx="402336" cy="402336"/>
+            <a:off x="457200" y="6291072"/>
+            <a:ext cx="1051560" cy="493776"/>
           </a:xfrm>
           <a:prstGeom prst="rect">
             <a:avLst/>
@@ -5018,14 +3731,14 @@
       </p:pic>
       <p:sp>
         <p:nvSpPr>
-          <p:cNvPr id="7" name="Text 4"/>
-          <p:cNvSpPr/>
-          <p:nvPr/>
-        </p:nvSpPr>
-        <p:spPr>
-          <a:xfrm>
-            <a:off x="1645920" y="1645920"/>
-            <a:ext cx="4023360" cy="731520"/>
+          <p:cNvPr id="17" name="Text 14"/>
+          <p:cNvSpPr/>
+          <p:nvPr/>
+        </p:nvSpPr>
+        <p:spPr>
+          <a:xfrm>
+            <a:off x="1645920" y="6327648"/>
+            <a:ext cx="7315200" cy="365760"/>
           </a:xfrm>
           <a:prstGeom prst="rect">
             <a:avLst/>
@@ -5041,109 +3754,30 @@
               <a:buNone/>
             </a:pPr>
             <a:r>
-              <a:rPr lang="en-US" sz="1900" b="1" dirty="0">
-                <a:solidFill>
-                  <a:srgbClr val="1F2A6E"/>
-                </a:solidFill>
-                <a:latin typeface="Cambria" pitchFamily="34" charset="0"/>
-                <a:ea typeface="Cambria" pitchFamily="34" charset="-122"/>
-                <a:cs typeface="Cambria" pitchFamily="34" charset="-120"/>
-              </a:rPr>
-              <a:t>Kirish qurilmalari (Input)</a:t>
-            </a:r>
-            <a:endParaRPr lang="en-US" sz="1900" dirty="0"/>
-          </a:p>
-        </p:txBody>
-      </p:sp>
-      <p:sp>
-        <p:nvSpPr>
-          <p:cNvPr id="8" name="Shape 5"/>
-          <p:cNvSpPr/>
-          <p:nvPr/>
-        </p:nvSpPr>
-        <p:spPr>
-          <a:xfrm>
-            <a:off x="868680" y="2761488"/>
-            <a:ext cx="146304" cy="146304"/>
-          </a:xfrm>
-          <a:prstGeom prst="ellipse">
-            <a:avLst/>
-          </a:prstGeom>
-          <a:solidFill>
-            <a:srgbClr val="27AE60"/>
-          </a:solidFill>
-          <a:ln/>
-        </p:spPr>
-      </p:sp>
-      <p:sp>
-        <p:nvSpPr>
-          <p:cNvPr id="9" name="Text 6"/>
-          <p:cNvSpPr/>
-          <p:nvPr/>
-        </p:nvSpPr>
-        <p:spPr>
-          <a:xfrm>
-            <a:off x="1170432" y="2606040"/>
-            <a:ext cx="4297680" cy="411480"/>
-          </a:xfrm>
-          <a:prstGeom prst="rect">
-            <a:avLst/>
-          </a:prstGeom>
-          <a:noFill/>
-          <a:ln/>
-        </p:spPr>
-        <p:txBody>
-          <a:bodyPr wrap="square" rtlCol="0" anchor="ctr"/>
-          <a:lstStyle/>
-          <a:p>
-            <a:pPr indent="0" marL="0">
-              <a:buNone/>
-            </a:pPr>
-            <a:r>
-              <a:rPr lang="en-US" sz="1500" dirty="0">
-                <a:solidFill>
-                  <a:srgbClr val="1C2333"/>
+              <a:rPr lang="en-US" sz="900" dirty="0">
+                <a:solidFill>
+                  <a:srgbClr val="5B6472"/>
                 </a:solidFill>
                 <a:latin typeface="Calibri" pitchFamily="34" charset="0"/>
                 <a:ea typeface="Calibri" pitchFamily="34" charset="-122"/>
                 <a:cs typeface="Calibri" pitchFamily="34" charset="-120"/>
               </a:rPr>
-              <a:t>Klaviatura</a:t>
-            </a:r>
-            <a:endParaRPr lang="en-US" sz="1500" dirty="0"/>
-          </a:p>
-        </p:txBody>
-      </p:sp>
-      <p:sp>
-        <p:nvSpPr>
-          <p:cNvPr id="10" name="Shape 7"/>
-          <p:cNvSpPr/>
-          <p:nvPr/>
-        </p:nvSpPr>
-        <p:spPr>
-          <a:xfrm>
-            <a:off x="868680" y="3310128"/>
-            <a:ext cx="146304" cy="146304"/>
-          </a:xfrm>
-          <a:prstGeom prst="ellipse">
-            <a:avLst/>
-          </a:prstGeom>
-          <a:solidFill>
-            <a:srgbClr val="27AE60"/>
-          </a:solidFill>
-          <a:ln/>
-        </p:spPr>
-      </p:sp>
-      <p:sp>
-        <p:nvSpPr>
-          <p:cNvPr id="11" name="Text 8"/>
-          <p:cNvSpPr/>
-          <p:nvPr/>
-        </p:nvSpPr>
-        <p:spPr>
-          <a:xfrm>
-            <a:off x="1170432" y="3154680"/>
-            <a:ext cx="4297680" cy="411480"/>
+              <a:t>Yoshlar Axborot Texnologiyalari Markazi</a:t>
+            </a:r>
+            <a:endParaRPr lang="en-US" sz="900" dirty="0"/>
+          </a:p>
+        </p:txBody>
+      </p:sp>
+      <p:sp>
+        <p:nvSpPr>
+          <p:cNvPr id="18" name="Text 15"/>
+          <p:cNvSpPr/>
+          <p:nvPr/>
+        </p:nvSpPr>
+        <p:spPr>
+          <a:xfrm>
+            <a:off x="9814255" y="6327648"/>
+            <a:ext cx="1920240" cy="365760"/>
           </a:xfrm>
           <a:prstGeom prst="rect">
             <a:avLst/>
@@ -5155,698 +3789,19 @@
           <a:bodyPr wrap="square" rtlCol="0" anchor="ctr"/>
           <a:lstStyle/>
           <a:p>
-            <a:pPr indent="0" marL="0">
-              <a:buNone/>
-            </a:pPr>
-            <a:r>
-              <a:rPr lang="en-US" sz="1500" dirty="0">
-                <a:solidFill>
-                  <a:srgbClr val="1C2333"/>
+            <a:pPr algn="r" indent="0" marL="0">
+              <a:buNone/>
+            </a:pPr>
+            <a:r>
+              <a:rPr lang="en-US" sz="900" dirty="0">
+                <a:solidFill>
+                  <a:srgbClr val="5B6472"/>
                 </a:solidFill>
                 <a:latin typeface="Calibri" pitchFamily="34" charset="0"/>
                 <a:ea typeface="Calibri" pitchFamily="34" charset="-122"/>
                 <a:cs typeface="Calibri" pitchFamily="34" charset="-120"/>
               </a:rPr>
-              <a:t>Sichqoncha</a:t>
-            </a:r>
-            <a:endParaRPr lang="en-US" sz="1500" dirty="0"/>
-          </a:p>
-        </p:txBody>
-      </p:sp>
-      <p:sp>
-        <p:nvSpPr>
-          <p:cNvPr id="12" name="Shape 9"/>
-          <p:cNvSpPr/>
-          <p:nvPr/>
-        </p:nvSpPr>
-        <p:spPr>
-          <a:xfrm>
-            <a:off x="868680" y="3858768"/>
-            <a:ext cx="146304" cy="146304"/>
-          </a:xfrm>
-          <a:prstGeom prst="ellipse">
-            <a:avLst/>
-          </a:prstGeom>
-          <a:solidFill>
-            <a:srgbClr val="27AE60"/>
-          </a:solidFill>
-          <a:ln/>
-        </p:spPr>
-      </p:sp>
-      <p:sp>
-        <p:nvSpPr>
-          <p:cNvPr id="13" name="Text 10"/>
-          <p:cNvSpPr/>
-          <p:nvPr/>
-        </p:nvSpPr>
-        <p:spPr>
-          <a:xfrm>
-            <a:off x="1170432" y="3703320"/>
-            <a:ext cx="4297680" cy="411480"/>
-          </a:xfrm>
-          <a:prstGeom prst="rect">
-            <a:avLst/>
-          </a:prstGeom>
-          <a:noFill/>
-          <a:ln/>
-        </p:spPr>
-        <p:txBody>
-          <a:bodyPr wrap="square" rtlCol="0" anchor="ctr"/>
-          <a:lstStyle/>
-          <a:p>
-            <a:pPr indent="0" marL="0">
-              <a:buNone/>
-            </a:pPr>
-            <a:r>
-              <a:rPr lang="en-US" sz="1500" dirty="0">
-                <a:solidFill>
-                  <a:srgbClr val="1C2333"/>
-                </a:solidFill>
-                <a:latin typeface="Calibri" pitchFamily="34" charset="0"/>
-                <a:ea typeface="Calibri" pitchFamily="34" charset="-122"/>
-                <a:cs typeface="Calibri" pitchFamily="34" charset="-120"/>
-              </a:rPr>
-              <a:t>Skaner</a:t>
-            </a:r>
-            <a:endParaRPr lang="en-US" sz="1500" dirty="0"/>
-          </a:p>
-        </p:txBody>
-      </p:sp>
-      <p:sp>
-        <p:nvSpPr>
-          <p:cNvPr id="14" name="Shape 11"/>
-          <p:cNvSpPr/>
-          <p:nvPr/>
-        </p:nvSpPr>
-        <p:spPr>
-          <a:xfrm>
-            <a:off x="868680" y="4407408"/>
-            <a:ext cx="146304" cy="146304"/>
-          </a:xfrm>
-          <a:prstGeom prst="ellipse">
-            <a:avLst/>
-          </a:prstGeom>
-          <a:solidFill>
-            <a:srgbClr val="27AE60"/>
-          </a:solidFill>
-          <a:ln/>
-        </p:spPr>
-      </p:sp>
-      <p:sp>
-        <p:nvSpPr>
-          <p:cNvPr id="15" name="Text 12"/>
-          <p:cNvSpPr/>
-          <p:nvPr/>
-        </p:nvSpPr>
-        <p:spPr>
-          <a:xfrm>
-            <a:off x="1170432" y="4251960"/>
-            <a:ext cx="4297680" cy="411480"/>
-          </a:xfrm>
-          <a:prstGeom prst="rect">
-            <a:avLst/>
-          </a:prstGeom>
-          <a:noFill/>
-          <a:ln/>
-        </p:spPr>
-        <p:txBody>
-          <a:bodyPr wrap="square" rtlCol="0" anchor="ctr"/>
-          <a:lstStyle/>
-          <a:p>
-            <a:pPr indent="0" marL="0">
-              <a:buNone/>
-            </a:pPr>
-            <a:r>
-              <a:rPr lang="en-US" sz="1500" dirty="0">
-                <a:solidFill>
-                  <a:srgbClr val="1C2333"/>
-                </a:solidFill>
-                <a:latin typeface="Calibri" pitchFamily="34" charset="0"/>
-                <a:ea typeface="Calibri" pitchFamily="34" charset="-122"/>
-                <a:cs typeface="Calibri" pitchFamily="34" charset="-120"/>
-              </a:rPr>
-              <a:t>Mikrofon</a:t>
-            </a:r>
-            <a:endParaRPr lang="en-US" sz="1500" dirty="0"/>
-          </a:p>
-        </p:txBody>
-      </p:sp>
-      <p:sp>
-        <p:nvSpPr>
-          <p:cNvPr id="16" name="Shape 13"/>
-          <p:cNvSpPr/>
-          <p:nvPr/>
-        </p:nvSpPr>
-        <p:spPr>
-          <a:xfrm>
-            <a:off x="868680" y="4956048"/>
-            <a:ext cx="146304" cy="146304"/>
-          </a:xfrm>
-          <a:prstGeom prst="ellipse">
-            <a:avLst/>
-          </a:prstGeom>
-          <a:solidFill>
-            <a:srgbClr val="27AE60"/>
-          </a:solidFill>
-          <a:ln/>
-        </p:spPr>
-      </p:sp>
-      <p:sp>
-        <p:nvSpPr>
-          <p:cNvPr id="17" name="Text 14"/>
-          <p:cNvSpPr/>
-          <p:nvPr/>
-        </p:nvSpPr>
-        <p:spPr>
-          <a:xfrm>
-            <a:off x="1170432" y="4800600"/>
-            <a:ext cx="4297680" cy="411480"/>
-          </a:xfrm>
-          <a:prstGeom prst="rect">
-            <a:avLst/>
-          </a:prstGeom>
-          <a:noFill/>
-          <a:ln/>
-        </p:spPr>
-        <p:txBody>
-          <a:bodyPr wrap="square" rtlCol="0" anchor="ctr"/>
-          <a:lstStyle/>
-          <a:p>
-            <a:pPr indent="0" marL="0">
-              <a:buNone/>
-            </a:pPr>
-            <a:r>
-              <a:rPr lang="en-US" sz="1500" dirty="0">
-                <a:solidFill>
-                  <a:srgbClr val="1C2333"/>
-                </a:solidFill>
-                <a:latin typeface="Calibri" pitchFamily="34" charset="0"/>
-                <a:ea typeface="Calibri" pitchFamily="34" charset="-122"/>
-                <a:cs typeface="Calibri" pitchFamily="34" charset="-120"/>
-              </a:rPr>
-              <a:t>Veb-kamera</a:t>
-            </a:r>
-            <a:endParaRPr lang="en-US" sz="1500" dirty="0"/>
-          </a:p>
-        </p:txBody>
-      </p:sp>
-      <p:sp>
-        <p:nvSpPr>
-          <p:cNvPr id="18" name="Shape 15"/>
-          <p:cNvSpPr/>
-          <p:nvPr/>
-        </p:nvSpPr>
-        <p:spPr>
-          <a:xfrm>
-            <a:off x="6400800" y="1325880"/>
-            <a:ext cx="5349240" cy="4297680"/>
-          </a:xfrm>
-          <a:prstGeom prst="roundRect">
-            <a:avLst>
-              <a:gd name="adj" fmla="val 2128"/>
-            </a:avLst>
-          </a:prstGeom>
-          <a:solidFill>
-            <a:srgbClr val="F4F6FB"/>
-          </a:solidFill>
-          <a:ln/>
-        </p:spPr>
-      </p:sp>
-      <p:sp>
-        <p:nvSpPr>
-          <p:cNvPr id="19" name="Shape 16"/>
-          <p:cNvSpPr/>
-          <p:nvPr/>
-        </p:nvSpPr>
-        <p:spPr>
-          <a:xfrm>
-            <a:off x="6720840" y="1645920"/>
-            <a:ext cx="731520" cy="731520"/>
-          </a:xfrm>
-          <a:prstGeom prst="ellipse">
-            <a:avLst/>
-          </a:prstGeom>
-          <a:solidFill>
-            <a:srgbClr val="E67E22"/>
-          </a:solidFill>
-          <a:ln/>
-        </p:spPr>
-      </p:sp>
-      <p:pic>
-        <p:nvPicPr>
-          <p:cNvPr id="20" name="Image 1" descr="preencoded.png">    </p:cNvPr>
-          <p:cNvPicPr>
-            <a:picLocks noChangeAspect="1"/>
-          </p:cNvPicPr>
-          <p:nvPr/>
-        </p:nvPicPr>
-        <p:blipFill>
-          <a:blip r:embed="rId2"/>
-          <a:stretch>
-            <a:fillRect/>
-          </a:stretch>
-        </p:blipFill>
-        <p:spPr>
-          <a:xfrm>
-            <a:off x="6885432" y="1810512"/>
-            <a:ext cx="402336" cy="402336"/>
-          </a:xfrm>
-          <a:prstGeom prst="rect">
-            <a:avLst/>
-          </a:prstGeom>
-        </p:spPr>
-      </p:pic>
-      <p:sp>
-        <p:nvSpPr>
-          <p:cNvPr id="21" name="Text 17"/>
-          <p:cNvSpPr/>
-          <p:nvPr/>
-        </p:nvSpPr>
-        <p:spPr>
-          <a:xfrm>
-            <a:off x="7589520" y="1645920"/>
-            <a:ext cx="4023360" cy="731520"/>
-          </a:xfrm>
-          <a:prstGeom prst="rect">
-            <a:avLst/>
-          </a:prstGeom>
-          <a:noFill/>
-          <a:ln/>
-        </p:spPr>
-        <p:txBody>
-          <a:bodyPr wrap="square" rtlCol="0" anchor="ctr"/>
-          <a:lstStyle/>
-          <a:p>
-            <a:pPr indent="0" marL="0">
-              <a:buNone/>
-            </a:pPr>
-            <a:r>
-              <a:rPr lang="en-US" sz="1900" b="1" dirty="0">
-                <a:solidFill>
-                  <a:srgbClr val="1F2A6E"/>
-                </a:solidFill>
-                <a:latin typeface="Cambria" pitchFamily="34" charset="0"/>
-                <a:ea typeface="Cambria" pitchFamily="34" charset="-122"/>
-                <a:cs typeface="Cambria" pitchFamily="34" charset="-120"/>
-              </a:rPr>
-              <a:t>Chiqish qurilmalari (Output)</a:t>
-            </a:r>
-            <a:endParaRPr lang="en-US" sz="1900" dirty="0"/>
-          </a:p>
-        </p:txBody>
-      </p:sp>
-      <p:sp>
-        <p:nvSpPr>
-          <p:cNvPr id="22" name="Shape 18"/>
-          <p:cNvSpPr/>
-          <p:nvPr/>
-        </p:nvSpPr>
-        <p:spPr>
-          <a:xfrm>
-            <a:off x="6812280" y="2761488"/>
-            <a:ext cx="146304" cy="146304"/>
-          </a:xfrm>
-          <a:prstGeom prst="ellipse">
-            <a:avLst/>
-          </a:prstGeom>
-          <a:solidFill>
-            <a:srgbClr val="E67E22"/>
-          </a:solidFill>
-          <a:ln/>
-        </p:spPr>
-      </p:sp>
-      <p:sp>
-        <p:nvSpPr>
-          <p:cNvPr id="23" name="Text 19"/>
-          <p:cNvSpPr/>
-          <p:nvPr/>
-        </p:nvSpPr>
-        <p:spPr>
-          <a:xfrm>
-            <a:off x="7114032" y="2606040"/>
-            <a:ext cx="4297680" cy="411480"/>
-          </a:xfrm>
-          <a:prstGeom prst="rect">
-            <a:avLst/>
-          </a:prstGeom>
-          <a:noFill/>
-          <a:ln/>
-        </p:spPr>
-        <p:txBody>
-          <a:bodyPr wrap="square" rtlCol="0" anchor="ctr"/>
-          <a:lstStyle/>
-          <a:p>
-            <a:pPr indent="0" marL="0">
-              <a:buNone/>
-            </a:pPr>
-            <a:r>
-              <a:rPr lang="en-US" sz="1500" dirty="0">
-                <a:solidFill>
-                  <a:srgbClr val="1C2333"/>
-                </a:solidFill>
-                <a:latin typeface="Calibri" pitchFamily="34" charset="0"/>
-                <a:ea typeface="Calibri" pitchFamily="34" charset="-122"/>
-                <a:cs typeface="Calibri" pitchFamily="34" charset="-120"/>
-              </a:rPr>
-              <a:t>Monitor</a:t>
-            </a:r>
-            <a:endParaRPr lang="en-US" sz="1500" dirty="0"/>
-          </a:p>
-        </p:txBody>
-      </p:sp>
-      <p:sp>
-        <p:nvSpPr>
-          <p:cNvPr id="24" name="Shape 20"/>
-          <p:cNvSpPr/>
-          <p:nvPr/>
-        </p:nvSpPr>
-        <p:spPr>
-          <a:xfrm>
-            <a:off x="6812280" y="3310128"/>
-            <a:ext cx="146304" cy="146304"/>
-          </a:xfrm>
-          <a:prstGeom prst="ellipse">
-            <a:avLst/>
-          </a:prstGeom>
-          <a:solidFill>
-            <a:srgbClr val="E67E22"/>
-          </a:solidFill>
-          <a:ln/>
-        </p:spPr>
-      </p:sp>
-      <p:sp>
-        <p:nvSpPr>
-          <p:cNvPr id="25" name="Text 21"/>
-          <p:cNvSpPr/>
-          <p:nvPr/>
-        </p:nvSpPr>
-        <p:spPr>
-          <a:xfrm>
-            <a:off x="7114032" y="3154680"/>
-            <a:ext cx="4297680" cy="411480"/>
-          </a:xfrm>
-          <a:prstGeom prst="rect">
-            <a:avLst/>
-          </a:prstGeom>
-          <a:noFill/>
-          <a:ln/>
-        </p:spPr>
-        <p:txBody>
-          <a:bodyPr wrap="square" rtlCol="0" anchor="ctr"/>
-          <a:lstStyle/>
-          <a:p>
-            <a:pPr indent="0" marL="0">
-              <a:buNone/>
-            </a:pPr>
-            <a:r>
-              <a:rPr lang="en-US" sz="1500" dirty="0">
-                <a:solidFill>
-                  <a:srgbClr val="1C2333"/>
-                </a:solidFill>
-                <a:latin typeface="Calibri" pitchFamily="34" charset="0"/>
-                <a:ea typeface="Calibri" pitchFamily="34" charset="-122"/>
-                <a:cs typeface="Calibri" pitchFamily="34" charset="-120"/>
-              </a:rPr>
-              <a:t>Printer</a:t>
-            </a:r>
-            <a:endParaRPr lang="en-US" sz="1500" dirty="0"/>
-          </a:p>
-        </p:txBody>
-      </p:sp>
-      <p:sp>
-        <p:nvSpPr>
-          <p:cNvPr id="26" name="Shape 22"/>
-          <p:cNvSpPr/>
-          <p:nvPr/>
-        </p:nvSpPr>
-        <p:spPr>
-          <a:xfrm>
-            <a:off x="6812280" y="3858768"/>
-            <a:ext cx="146304" cy="146304"/>
-          </a:xfrm>
-          <a:prstGeom prst="ellipse">
-            <a:avLst/>
-          </a:prstGeom>
-          <a:solidFill>
-            <a:srgbClr val="E67E22"/>
-          </a:solidFill>
-          <a:ln/>
-        </p:spPr>
-      </p:sp>
-      <p:sp>
-        <p:nvSpPr>
-          <p:cNvPr id="27" name="Text 23"/>
-          <p:cNvSpPr/>
-          <p:nvPr/>
-        </p:nvSpPr>
-        <p:spPr>
-          <a:xfrm>
-            <a:off x="7114032" y="3703320"/>
-            <a:ext cx="4297680" cy="411480"/>
-          </a:xfrm>
-          <a:prstGeom prst="rect">
-            <a:avLst/>
-          </a:prstGeom>
-          <a:noFill/>
-          <a:ln/>
-        </p:spPr>
-        <p:txBody>
-          <a:bodyPr wrap="square" rtlCol="0" anchor="ctr"/>
-          <a:lstStyle/>
-          <a:p>
-            <a:pPr indent="0" marL="0">
-              <a:buNone/>
-            </a:pPr>
-            <a:r>
-              <a:rPr lang="en-US" sz="1500" dirty="0">
-                <a:solidFill>
-                  <a:srgbClr val="1C2333"/>
-                </a:solidFill>
-                <a:latin typeface="Calibri" pitchFamily="34" charset="0"/>
-                <a:ea typeface="Calibri" pitchFamily="34" charset="-122"/>
-                <a:cs typeface="Calibri" pitchFamily="34" charset="-120"/>
-              </a:rPr>
-              <a:t>Kolonka</a:t>
-            </a:r>
-            <a:endParaRPr lang="en-US" sz="1500" dirty="0"/>
-          </a:p>
-        </p:txBody>
-      </p:sp>
-      <p:sp>
-        <p:nvSpPr>
-          <p:cNvPr id="28" name="Shape 24"/>
-          <p:cNvSpPr/>
-          <p:nvPr/>
-        </p:nvSpPr>
-        <p:spPr>
-          <a:xfrm>
-            <a:off x="6812280" y="4407408"/>
-            <a:ext cx="146304" cy="146304"/>
-          </a:xfrm>
-          <a:prstGeom prst="ellipse">
-            <a:avLst/>
-          </a:prstGeom>
-          <a:solidFill>
-            <a:srgbClr val="E67E22"/>
-          </a:solidFill>
-          <a:ln/>
-        </p:spPr>
-      </p:sp>
-      <p:sp>
-        <p:nvSpPr>
-          <p:cNvPr id="29" name="Text 25"/>
-          <p:cNvSpPr/>
-          <p:nvPr/>
-        </p:nvSpPr>
-        <p:spPr>
-          <a:xfrm>
-            <a:off x="7114032" y="4251960"/>
-            <a:ext cx="4297680" cy="411480"/>
-          </a:xfrm>
-          <a:prstGeom prst="rect">
-            <a:avLst/>
-          </a:prstGeom>
-          <a:noFill/>
-          <a:ln/>
-        </p:spPr>
-        <p:txBody>
-          <a:bodyPr wrap="square" rtlCol="0" anchor="ctr"/>
-          <a:lstStyle/>
-          <a:p>
-            <a:pPr indent="0" marL="0">
-              <a:buNone/>
-            </a:pPr>
-            <a:r>
-              <a:rPr lang="en-US" sz="1500" dirty="0">
-                <a:solidFill>
-                  <a:srgbClr val="1C2333"/>
-                </a:solidFill>
-                <a:latin typeface="Calibri" pitchFamily="34" charset="0"/>
-                <a:ea typeface="Calibri" pitchFamily="34" charset="-122"/>
-                <a:cs typeface="Calibri" pitchFamily="34" charset="-120"/>
-              </a:rPr>
-              <a:t>Proyektor</a:t>
-            </a:r>
-            <a:endParaRPr lang="en-US" sz="1500" dirty="0"/>
-          </a:p>
-        </p:txBody>
-      </p:sp>
-      <p:sp>
-        <p:nvSpPr>
-          <p:cNvPr id="30" name="Shape 26"/>
-          <p:cNvSpPr/>
-          <p:nvPr/>
-        </p:nvSpPr>
-        <p:spPr>
-          <a:xfrm>
-            <a:off x="6812280" y="4956048"/>
-            <a:ext cx="146304" cy="146304"/>
-          </a:xfrm>
-          <a:prstGeom prst="ellipse">
-            <a:avLst/>
-          </a:prstGeom>
-          <a:solidFill>
-            <a:srgbClr val="E67E22"/>
-          </a:solidFill>
-          <a:ln/>
-        </p:spPr>
-      </p:sp>
-      <p:sp>
-        <p:nvSpPr>
-          <p:cNvPr id="31" name="Text 27"/>
-          <p:cNvSpPr/>
-          <p:nvPr/>
-        </p:nvSpPr>
-        <p:spPr>
-          <a:xfrm>
-            <a:off x="7114032" y="4800600"/>
-            <a:ext cx="4297680" cy="411480"/>
-          </a:xfrm>
-          <a:prstGeom prst="rect">
-            <a:avLst/>
-          </a:prstGeom>
-          <a:noFill/>
-          <a:ln/>
-        </p:spPr>
-        <p:txBody>
-          <a:bodyPr wrap="square" rtlCol="0" anchor="ctr"/>
-          <a:lstStyle/>
-          <a:p>
-            <a:pPr indent="0" marL="0">
-              <a:buNone/>
-            </a:pPr>
-            <a:r>
-              <a:rPr lang="en-US" sz="1500" dirty="0">
-                <a:solidFill>
-                  <a:srgbClr val="1C2333"/>
-                </a:solidFill>
-                <a:latin typeface="Calibri" pitchFamily="34" charset="0"/>
-                <a:ea typeface="Calibri" pitchFamily="34" charset="-122"/>
-                <a:cs typeface="Calibri" pitchFamily="34" charset="-120"/>
-              </a:rPr>
-              <a:t>Quloqlik</a:t>
-            </a:r>
-            <a:endParaRPr lang="en-US" sz="1500" dirty="0"/>
-          </a:p>
-        </p:txBody>
-      </p:sp>
-      <p:pic>
-        <p:nvPicPr>
-          <p:cNvPr id="32" name="Image 2" descr="/sessions/ecstatic-admiring-tesla/mnt/outputs/assets/logo.png">    </p:cNvPr>
-          <p:cNvPicPr>
-            <a:picLocks noChangeAspect="1"/>
-          </p:cNvPicPr>
-          <p:nvPr/>
-        </p:nvPicPr>
-        <p:blipFill>
-          <a:blip r:embed="rId3"/>
-          <a:stretch>
-            <a:fillRect/>
-          </a:stretch>
-        </p:blipFill>
-        <p:spPr>
-          <a:xfrm>
-            <a:off x="457200" y="6291072"/>
-            <a:ext cx="1051560" cy="493776"/>
-          </a:xfrm>
-          <a:prstGeom prst="rect">
-            <a:avLst/>
-          </a:prstGeom>
-        </p:spPr>
-      </p:pic>
-      <p:sp>
-        <p:nvSpPr>
-          <p:cNvPr id="33" name="Text 28"/>
-          <p:cNvSpPr/>
-          <p:nvPr/>
-        </p:nvSpPr>
-        <p:spPr>
-          <a:xfrm>
-            <a:off x="1645920" y="6327648"/>
-            <a:ext cx="7315200" cy="365760"/>
-          </a:xfrm>
-          <a:prstGeom prst="rect">
-            <a:avLst/>
-          </a:prstGeom>
-          <a:noFill/>
-          <a:ln/>
-        </p:spPr>
-        <p:txBody>
-          <a:bodyPr wrap="square" rtlCol="0" anchor="ctr"/>
-          <a:lstStyle/>
-          <a:p>
-            <a:pPr indent="0" marL="0">
-              <a:buNone/>
-            </a:pPr>
-            <a:r>
-              <a:rPr lang="en-US" sz="900" dirty="0">
-                <a:solidFill>
-                  <a:srgbClr val="5B6472"/>
-                </a:solidFill>
-                <a:latin typeface="Calibri" pitchFamily="34" charset="0"/>
-                <a:ea typeface="Calibri" pitchFamily="34" charset="-122"/>
-                <a:cs typeface="Calibri" pitchFamily="34" charset="-120"/>
-              </a:rPr>
-              <a:t>Yoshlar Axborot Texnologiyalari Markazi</a:t>
-            </a:r>
-            <a:endParaRPr lang="en-US" sz="900" dirty="0"/>
-          </a:p>
-        </p:txBody>
-      </p:sp>
-      <p:sp>
-        <p:nvSpPr>
-          <p:cNvPr id="34" name="Text 29"/>
-          <p:cNvSpPr/>
-          <p:nvPr/>
-        </p:nvSpPr>
-        <p:spPr>
-          <a:xfrm>
-            <a:off x="9997135" y="6327648"/>
-            <a:ext cx="1737360" cy="365760"/>
-          </a:xfrm>
-          <a:prstGeom prst="rect">
-            <a:avLst/>
-          </a:prstGeom>
-          <a:noFill/>
-          <a:ln/>
-        </p:spPr>
-        <p:txBody>
-          <a:bodyPr wrap="square" rtlCol="0" anchor="ctr"/>
-          <a:lstStyle/>
-          <a:p>
-            <a:pPr algn="r" indent="0" marL="0">
-              <a:buNone/>
-            </a:pPr>
-            <a:r>
-              <a:rPr lang="en-US" sz="900" dirty="0">
-                <a:solidFill>
-                  <a:srgbClr val="5B6472"/>
-                </a:solidFill>
-                <a:latin typeface="Calibri" pitchFamily="34" charset="0"/>
-                <a:ea typeface="Calibri" pitchFamily="34" charset="-122"/>
-                <a:cs typeface="Calibri" pitchFamily="34" charset="-120"/>
-              </a:rPr>
-              <a:t>01-dars  •  Kirish / Chiqish</a:t>
+              <a:t>01-dars  •  Atamalar</a:t>
             </a:r>
             <a:endParaRPr lang="en-US" sz="900" dirty="0"/>
           </a:p>
@@ -5860,9 +3815,9 @@
 </p:sld>
 </file>
 
-<file path=ppt/slides/slide6.xml><?xml version="1.0" encoding="utf-8"?>
+<file path=ppt/slides/slide5.xml><?xml version="1.0" encoding="utf-8"?>
 <p:sld xmlns:a="http://schemas.openxmlformats.org/drawingml/2006/main" xmlns:r="http://schemas.openxmlformats.org/officeDocument/2006/relationships" xmlns:p="http://schemas.openxmlformats.org/presentationml/2006/main">
-  <p:cSld name="Slide 6">
+  <p:cSld name="Slide 5">
     <p:bg>
       <p:bgPr>
         <a:solidFill>
@@ -5953,7 +3908,7 @@
               <a:buNone/>
             </a:pPr>
             <a:r>
-              <a:rPr lang="en-US" sz="2700" b="1" dirty="0">
+              <a:rPr lang="en-US" sz="2600" b="1" dirty="0">
                 <a:solidFill>
                   <a:srgbClr val="FFFFFF"/>
                 </a:solidFill>
@@ -5963,7 +3918,7 @@
               </a:rPr>
               <a:t>Amaliy topshiriq</a:t>
             </a:r>
-            <a:endParaRPr lang="en-US" sz="2700" dirty="0"/>
+            <a:endParaRPr lang="en-US" sz="2600" dirty="0"/>
           </a:p>
         </p:txBody>
       </p:sp>
@@ -5975,12 +3930,12 @@
         </p:nvSpPr>
         <p:spPr>
           <a:xfrm>
-            <a:off x="502920" y="1234440"/>
-            <a:ext cx="11155680" cy="868680"/>
+            <a:off x="502920" y="1207008"/>
+            <a:ext cx="11155680" cy="841248"/>
           </a:xfrm>
           <a:prstGeom prst="roundRect">
             <a:avLst>
-              <a:gd name="adj" fmla="val 8421"/>
+              <a:gd name="adj" fmla="val 8696"/>
             </a:avLst>
           </a:prstGeom>
           <a:solidFill>
@@ -5997,8 +3952,8 @@
         </p:nvSpPr>
         <p:spPr>
           <a:xfrm>
-            <a:off x="777240" y="1280160"/>
-            <a:ext cx="10607040" cy="777240"/>
+            <a:off x="777240" y="1243584"/>
+            <a:ext cx="10607040" cy="768096"/>
           </a:xfrm>
           <a:prstGeom prst="rect">
             <a:avLst/>
@@ -6014,7 +3969,7 @@
               <a:buNone/>
             </a:pPr>
             <a:r>
-              <a:rPr lang="en-US" sz="1550" b="1" dirty="0">
+              <a:rPr lang="en-US" sz="1500" b="1" dirty="0">
                 <a:solidFill>
                   <a:srgbClr val="1F2A6E"/>
                 </a:solidFill>
@@ -6022,9 +3977,9 @@
                 <a:ea typeface="Calibri" pitchFamily="34" charset="-122"/>
                 <a:cs typeface="Calibri" pitchFamily="34" charset="-120"/>
               </a:rPr>
-              <a:t>Sichqoncha va klaviatura trenajyorlarida ishlash. Yozuv tezligini daqiqasiga 30-35 belgiga yetkazish.</a:t>
-            </a:r>
-            <a:endParaRPr lang="en-US" sz="1550" dirty="0"/>
+              <a:t>"Tezyozar bo'l!" — klaviatura va sichqoncha mashqi</a:t>
+            </a:r>
+            <a:endParaRPr lang="en-US" sz="1500" dirty="0"/>
           </a:p>
         </p:txBody>
       </p:sp>
@@ -6036,8 +3991,8 @@
         </p:nvSpPr>
         <p:spPr>
           <a:xfrm>
-            <a:off x="640080" y="2423160"/>
-            <a:ext cx="457200" cy="457200"/>
+            <a:off x="640080" y="2331720"/>
+            <a:ext cx="438912" cy="438912"/>
           </a:xfrm>
           <a:prstGeom prst="ellipse">
             <a:avLst/>
@@ -6056,8 +4011,8 @@
         </p:nvSpPr>
         <p:spPr>
           <a:xfrm>
-            <a:off x="640080" y="2423160"/>
-            <a:ext cx="457200" cy="457200"/>
+            <a:off x="640080" y="2331720"/>
+            <a:ext cx="438912" cy="438912"/>
           </a:xfrm>
           <a:prstGeom prst="rect">
             <a:avLst/>
@@ -6073,7 +4028,7 @@
               <a:buNone/>
             </a:pPr>
             <a:r>
-              <a:rPr lang="en-US" sz="1500" b="1" dirty="0">
+              <a:rPr lang="en-US" sz="1400" b="1" dirty="0">
                 <a:solidFill>
                   <a:srgbClr val="FFFFFF"/>
                 </a:solidFill>
@@ -6083,7 +4038,7 @@
               </a:rPr>
               <a:t>1</a:t>
             </a:r>
-            <a:endParaRPr lang="en-US" sz="1500" dirty="0"/>
+            <a:endParaRPr lang="en-US" sz="1400" dirty="0"/>
           </a:p>
         </p:txBody>
       </p:sp>
@@ -6095,8 +4050,8 @@
         </p:nvSpPr>
         <p:spPr>
           <a:xfrm>
-            <a:off x="1280160" y="2368296"/>
-            <a:ext cx="10332720" cy="566928"/>
+            <a:off x="1261872" y="2258568"/>
+            <a:ext cx="10424160" cy="585216"/>
           </a:xfrm>
           <a:prstGeom prst="rect">
             <a:avLst/>
@@ -6115,7 +4070,7 @@
               <a:buNone/>
             </a:pPr>
             <a:r>
-              <a:rPr lang="en-US" sz="1400" dirty="0">
+              <a:rPr lang="en-US" sz="1350" dirty="0">
                 <a:solidFill>
                   <a:srgbClr val="EAEEFA"/>
                 </a:solidFill>
@@ -6123,9 +4078,9 @@
                 <a:ea typeface="Calibri" pitchFamily="34" charset="-122"/>
                 <a:cs typeface="Calibri" pitchFamily="34" charset="-120"/>
               </a:rPr>
-              <a:t>Kompyuterni yoqing va klaviatura trenajyorini oching (masalan: stamina, klava.org yoki ratatype.com).</a:t>
-            </a:r>
-            <a:endParaRPr lang="en-US" sz="1400" dirty="0"/>
+              <a:t>Klaviatura trenajyorini och (stamina, klava.org yoki ratatype.com).</a:t>
+            </a:r>
+            <a:endParaRPr lang="en-US" sz="1350" dirty="0"/>
           </a:p>
         </p:txBody>
       </p:sp>
@@ -6137,8 +4092,8 @@
         </p:nvSpPr>
         <p:spPr>
           <a:xfrm>
-            <a:off x="640080" y="3172968"/>
-            <a:ext cx="457200" cy="457200"/>
+            <a:off x="640080" y="3063240"/>
+            <a:ext cx="438912" cy="438912"/>
           </a:xfrm>
           <a:prstGeom prst="ellipse">
             <a:avLst/>
@@ -6157,8 +4112,8 @@
         </p:nvSpPr>
         <p:spPr>
           <a:xfrm>
-            <a:off x="640080" y="3172968"/>
-            <a:ext cx="457200" cy="457200"/>
+            <a:off x="640080" y="3063240"/>
+            <a:ext cx="438912" cy="438912"/>
           </a:xfrm>
           <a:prstGeom prst="rect">
             <a:avLst/>
@@ -6174,7 +4129,7 @@
               <a:buNone/>
             </a:pPr>
             <a:r>
-              <a:rPr lang="en-US" sz="1500" b="1" dirty="0">
+              <a:rPr lang="en-US" sz="1400" b="1" dirty="0">
                 <a:solidFill>
                   <a:srgbClr val="FFFFFF"/>
                 </a:solidFill>
@@ -6184,7 +4139,7 @@
               </a:rPr>
               <a:t>2</a:t>
             </a:r>
-            <a:endParaRPr lang="en-US" sz="1500" dirty="0"/>
+            <a:endParaRPr lang="en-US" sz="1400" dirty="0"/>
           </a:p>
         </p:txBody>
       </p:sp>
@@ -6196,8 +4151,8 @@
         </p:nvSpPr>
         <p:spPr>
           <a:xfrm>
-            <a:off x="1280160" y="3118104"/>
-            <a:ext cx="10332720" cy="566928"/>
+            <a:off x="1261872" y="2990088"/>
+            <a:ext cx="10424160" cy="585216"/>
           </a:xfrm>
           <a:prstGeom prst="rect">
             <a:avLst/>
@@ -6216,7 +4171,7 @@
               <a:buNone/>
             </a:pPr>
             <a:r>
-              <a:rPr lang="en-US" sz="1400" dirty="0">
+              <a:rPr lang="en-US" sz="1350" dirty="0">
                 <a:solidFill>
                   <a:srgbClr val="EAEEFA"/>
                 </a:solidFill>
@@ -6224,9 +4179,9 @@
                 <a:ea typeface="Calibri" pitchFamily="34" charset="-122"/>
                 <a:cs typeface="Calibri" pitchFamily="34" charset="-120"/>
               </a:rPr>
-              <a:t>Barmoqlarni standart holatga qo'ying (chap qo'l ASDF, o'ng qo'l JKL;) va ekranga qaramay yozishga harakat qiling.</a:t>
-            </a:r>
-            <a:endParaRPr lang="en-US" sz="1400" dirty="0"/>
+              <a:t>Barmoqlarni standart holatga qo'y: chap qo'l A S D F, o'ng qo'l J K L ; ustida.</a:t>
+            </a:r>
+            <a:endParaRPr lang="en-US" sz="1350" dirty="0"/>
           </a:p>
         </p:txBody>
       </p:sp>
@@ -6238,8 +4193,8 @@
         </p:nvSpPr>
         <p:spPr>
           <a:xfrm>
-            <a:off x="640080" y="3922776"/>
-            <a:ext cx="457200" cy="457200"/>
+            <a:off x="640080" y="3794760"/>
+            <a:ext cx="438912" cy="438912"/>
           </a:xfrm>
           <a:prstGeom prst="ellipse">
             <a:avLst/>
@@ -6258,8 +4213,8 @@
         </p:nvSpPr>
         <p:spPr>
           <a:xfrm>
-            <a:off x="640080" y="3922776"/>
-            <a:ext cx="457200" cy="457200"/>
+            <a:off x="640080" y="3794760"/>
+            <a:ext cx="438912" cy="438912"/>
           </a:xfrm>
           <a:prstGeom prst="rect">
             <a:avLst/>
@@ -6275,7 +4230,7 @@
               <a:buNone/>
             </a:pPr>
             <a:r>
-              <a:rPr lang="en-US" sz="1500" b="1" dirty="0">
+              <a:rPr lang="en-US" sz="1400" b="1" dirty="0">
                 <a:solidFill>
                   <a:srgbClr val="FFFFFF"/>
                 </a:solidFill>
@@ -6285,7 +4240,7 @@
               </a:rPr>
               <a:t>3</a:t>
             </a:r>
-            <a:endParaRPr lang="en-US" sz="1500" dirty="0"/>
+            <a:endParaRPr lang="en-US" sz="1400" dirty="0"/>
           </a:p>
         </p:txBody>
       </p:sp>
@@ -6297,8 +4252,8 @@
         </p:nvSpPr>
         <p:spPr>
           <a:xfrm>
-            <a:off x="1280160" y="3867912"/>
-            <a:ext cx="10332720" cy="566928"/>
+            <a:off x="1261872" y="3721608"/>
+            <a:ext cx="10424160" cy="585216"/>
           </a:xfrm>
           <a:prstGeom prst="rect">
             <a:avLst/>
@@ -6317,7 +4272,7 @@
               <a:buNone/>
             </a:pPr>
             <a:r>
-              <a:rPr lang="en-US" sz="1400" dirty="0">
+              <a:rPr lang="en-US" sz="1350" dirty="0">
                 <a:solidFill>
                   <a:srgbClr val="EAEEFA"/>
                 </a:solidFill>
@@ -6325,9 +4280,9 @@
                 <a:ea typeface="Calibri" pitchFamily="34" charset="-122"/>
                 <a:cs typeface="Calibri" pitchFamily="34" charset="-120"/>
               </a:rPr>
-              <a:t>Berilgan matnni xato qilmasdan tering; tezlikni asta-sekin daqiqasiga 30-35 belgiga yetkazing.</a:t>
-            </a:r>
-            <a:endParaRPr lang="en-US" sz="1400" dirty="0"/>
+              <a:t>Berilgan matnni ekranga qaramaslikka harakat qilib, xatosiz ter.</a:t>
+            </a:r>
+            <a:endParaRPr lang="en-US" sz="1350" dirty="0"/>
           </a:p>
         </p:txBody>
       </p:sp>
@@ -6339,8 +4294,8 @@
         </p:nvSpPr>
         <p:spPr>
           <a:xfrm>
-            <a:off x="640080" y="4672584"/>
-            <a:ext cx="457200" cy="457200"/>
+            <a:off x="640080" y="4526280"/>
+            <a:ext cx="438912" cy="438912"/>
           </a:xfrm>
           <a:prstGeom prst="ellipse">
             <a:avLst/>
@@ -6359,8 +4314,8 @@
         </p:nvSpPr>
         <p:spPr>
           <a:xfrm>
-            <a:off x="640080" y="4672584"/>
-            <a:ext cx="457200" cy="457200"/>
+            <a:off x="640080" y="4526280"/>
+            <a:ext cx="438912" cy="438912"/>
           </a:xfrm>
           <a:prstGeom prst="rect">
             <a:avLst/>
@@ -6376,7 +4331,7 @@
               <a:buNone/>
             </a:pPr>
             <a:r>
-              <a:rPr lang="en-US" sz="1500" b="1" dirty="0">
+              <a:rPr lang="en-US" sz="1400" b="1" dirty="0">
                 <a:solidFill>
                   <a:srgbClr val="FFFFFF"/>
                 </a:solidFill>
@@ -6386,7 +4341,7 @@
               </a:rPr>
               <a:t>4</a:t>
             </a:r>
-            <a:endParaRPr lang="en-US" sz="1500" dirty="0"/>
+            <a:endParaRPr lang="en-US" sz="1400" dirty="0"/>
           </a:p>
         </p:txBody>
       </p:sp>
@@ -6398,8 +4353,8 @@
         </p:nvSpPr>
         <p:spPr>
           <a:xfrm>
-            <a:off x="1280160" y="4617720"/>
-            <a:ext cx="10332720" cy="566928"/>
+            <a:off x="1261872" y="4453128"/>
+            <a:ext cx="10424160" cy="585216"/>
           </a:xfrm>
           <a:prstGeom prst="rect">
             <a:avLst/>
@@ -6418,7 +4373,7 @@
               <a:buNone/>
             </a:pPr>
             <a:r>
-              <a:rPr lang="en-US" sz="1400" dirty="0">
+              <a:rPr lang="en-US" sz="1350" dirty="0">
                 <a:solidFill>
                   <a:srgbClr val="EAEEFA"/>
                 </a:solidFill>
@@ -6426,9 +4381,9 @@
                 <a:ea typeface="Calibri" pitchFamily="34" charset="-122"/>
                 <a:cs typeface="Calibri" pitchFamily="34" charset="-120"/>
               </a:rPr>
-              <a:t>Sichqoncha trenajyorida nishonni bosish, ikki marta bosish va ushlab tortish (drag) mashqlarini bajaring.</a:t>
-            </a:r>
-            <a:endParaRPr lang="en-US" sz="1400" dirty="0"/>
+              <a:t>Sichqoncha trenajyorida nishonni bosish, ikki marta bosish va ushlab tortish (drag) mashqlarini bajar.</a:t>
+            </a:r>
+            <a:endParaRPr lang="en-US" sz="1350" dirty="0"/>
           </a:p>
         </p:txBody>
       </p:sp>
@@ -6440,8 +4395,8 @@
         </p:nvSpPr>
         <p:spPr>
           <a:xfrm>
-            <a:off x="640080" y="5422392"/>
-            <a:ext cx="457200" cy="457200"/>
+            <a:off x="640080" y="5257800"/>
+            <a:ext cx="438912" cy="438912"/>
           </a:xfrm>
           <a:prstGeom prst="ellipse">
             <a:avLst/>
@@ -6460,8 +4415,8 @@
         </p:nvSpPr>
         <p:spPr>
           <a:xfrm>
-            <a:off x="640080" y="5422392"/>
-            <a:ext cx="457200" cy="457200"/>
+            <a:off x="640080" y="5257800"/>
+            <a:ext cx="438912" cy="438912"/>
           </a:xfrm>
           <a:prstGeom prst="rect">
             <a:avLst/>
@@ -6477,7 +4432,7 @@
               <a:buNone/>
             </a:pPr>
             <a:r>
-              <a:rPr lang="en-US" sz="1500" b="1" dirty="0">
+              <a:rPr lang="en-US" sz="1400" b="1" dirty="0">
                 <a:solidFill>
                   <a:srgbClr val="FFFFFF"/>
                 </a:solidFill>
@@ -6487,7 +4442,7 @@
               </a:rPr>
               <a:t>5</a:t>
             </a:r>
-            <a:endParaRPr lang="en-US" sz="1500" dirty="0"/>
+            <a:endParaRPr lang="en-US" sz="1400" dirty="0"/>
           </a:p>
         </p:txBody>
       </p:sp>
@@ -6499,8 +4454,8 @@
         </p:nvSpPr>
         <p:spPr>
           <a:xfrm>
-            <a:off x="1280160" y="5367528"/>
-            <a:ext cx="10332720" cy="566928"/>
+            <a:off x="1261872" y="5184648"/>
+            <a:ext cx="10424160" cy="585216"/>
           </a:xfrm>
           <a:prstGeom prst="rect">
             <a:avLst/>
@@ -6519,7 +4474,7 @@
               <a:buNone/>
             </a:pPr>
             <a:r>
-              <a:rPr lang="en-US" sz="1400" dirty="0">
+              <a:rPr lang="en-US" sz="1350" dirty="0">
                 <a:solidFill>
                   <a:srgbClr val="EAEEFA"/>
                 </a:solidFill>
@@ -6527,9 +4482,9 @@
                 <a:ea typeface="Calibri" pitchFamily="34" charset="-122"/>
                 <a:cs typeface="Calibri" pitchFamily="34" charset="-120"/>
               </a:rPr>
-              <a:t>Yakuniy tezlik va xatolar sonini daftaringizga yozib oling.</a:t>
-            </a:r>
-            <a:endParaRPr lang="en-US" sz="1400" dirty="0"/>
+              <a:t>Yakuniy tezlik (belgi/daqiqa) va xatolar sonini daftaringga yozib qo'y.</a:t>
+            </a:r>
+            <a:endParaRPr lang="en-US" sz="1350" dirty="0"/>
           </a:p>
         </p:txBody>
       </p:sp>
@@ -6541,9 +4496,9 @@
 </p:sld>
 </file>
 
-<file path=ppt/slides/slide7.xml><?xml version="1.0" encoding="utf-8"?>
+<file path=ppt/slides/slide6.xml><?xml version="1.0" encoding="utf-8"?>
 <p:sld xmlns:a="http://schemas.openxmlformats.org/drawingml/2006/main" xmlns:r="http://schemas.openxmlformats.org/officeDocument/2006/relationships" xmlns:p="http://schemas.openxmlformats.org/presentationml/2006/main">
-  <p:cSld name="Slide 7">
+  <p:cSld name="Slide 6">
     <p:bg>
       <p:bgPr>
         <a:solidFill>
@@ -6596,7 +4551,7 @@
         <p:spPr>
           <a:xfrm>
             <a:off x="713232" y="365760"/>
-            <a:ext cx="10058400" cy="548640"/>
+            <a:ext cx="10972800" cy="548640"/>
           </a:xfrm>
           <a:prstGeom prst="rect">
             <a:avLst/>
@@ -6612,7 +4567,7 @@
               <a:buNone/>
             </a:pPr>
             <a:r>
-              <a:rPr lang="en-US" sz="2700" b="1" dirty="0">
+              <a:rPr lang="en-US" sz="2600" b="1" dirty="0">
                 <a:solidFill>
                   <a:srgbClr val="1F2A6E"/>
                 </a:solidFill>
@@ -6622,7 +4577,7 @@
               </a:rPr>
               <a:t>Nazorat savollari va uyga vazifa</a:t>
             </a:r>
-            <a:endParaRPr lang="en-US" sz="2700" dirty="0"/>
+            <a:endParaRPr lang="en-US" sz="2600" dirty="0"/>
           </a:p>
         </p:txBody>
       </p:sp>
@@ -6698,7 +4653,7 @@
         <p:spPr>
           <a:xfrm>
             <a:off x="548640" y="1965960"/>
-            <a:ext cx="457200" cy="457200"/>
+            <a:ext cx="457200" cy="548640"/>
           </a:xfrm>
           <a:prstGeom prst="rect">
             <a:avLst/>
@@ -6714,7 +4669,7 @@
               <a:buNone/>
             </a:pPr>
             <a:r>
-              <a:rPr lang="en-US" sz="1500" b="1" dirty="0">
+              <a:rPr lang="en-US" sz="1400" b="1" dirty="0">
                 <a:solidFill>
                   <a:srgbClr val="1FA8C9"/>
                 </a:solidFill>
@@ -6724,7 +4679,7 @@
               </a:rPr>
               <a:t>1.</a:t>
             </a:r>
-            <a:endParaRPr lang="en-US" sz="1500" dirty="0"/>
+            <a:endParaRPr lang="en-US" sz="1400" dirty="0"/>
           </a:p>
         </p:txBody>
       </p:sp>
@@ -6737,7 +4692,7 @@
         <p:spPr>
           <a:xfrm>
             <a:off x="1005840" y="1947672"/>
-            <a:ext cx="5486400" cy="594360"/>
+            <a:ext cx="5486400" cy="676656"/>
           </a:xfrm>
           <a:prstGeom prst="rect">
             <a:avLst/>
@@ -6756,7 +4711,7 @@
               <a:buNone/>
             </a:pPr>
             <a:r>
-              <a:rPr lang="en-US" sz="1350" dirty="0">
+              <a:rPr lang="en-US" sz="1300" dirty="0">
                 <a:solidFill>
                   <a:srgbClr val="1C2333"/>
                 </a:solidFill>
@@ -6764,9 +4719,9 @@
                 <a:ea typeface="Calibri" pitchFamily="34" charset="-122"/>
                 <a:cs typeface="Calibri" pitchFamily="34" charset="-120"/>
               </a:rPr>
-              <a:t>Kompyuterning tashqi va ichki qurilmalari bir-biridan nimasi bilan farq qiladi?</a:t>
-            </a:r>
-            <a:endParaRPr lang="en-US" sz="1350" dirty="0"/>
+              <a:t>Tashqi va ichki qurilmalar nimasi bilan farq qiladi?</a:t>
+            </a:r>
+            <a:endParaRPr lang="en-US" sz="1300" dirty="0"/>
           </a:p>
         </p:txBody>
       </p:sp>
@@ -6778,8 +4733,8 @@
         </p:nvSpPr>
         <p:spPr>
           <a:xfrm>
-            <a:off x="548640" y="2679192"/>
-            <a:ext cx="457200" cy="457200"/>
+            <a:off x="548640" y="2697480"/>
+            <a:ext cx="457200" cy="548640"/>
           </a:xfrm>
           <a:prstGeom prst="rect">
             <a:avLst/>
@@ -6795,7 +4750,7 @@
               <a:buNone/>
             </a:pPr>
             <a:r>
-              <a:rPr lang="en-US" sz="1500" b="1" dirty="0">
+              <a:rPr lang="en-US" sz="1400" b="1" dirty="0">
                 <a:solidFill>
                   <a:srgbClr val="1FA8C9"/>
                 </a:solidFill>
@@ -6805,7 +4760,7 @@
               </a:rPr>
               <a:t>2.</a:t>
             </a:r>
-            <a:endParaRPr lang="en-US" sz="1500" dirty="0"/>
+            <a:endParaRPr lang="en-US" sz="1400" dirty="0"/>
           </a:p>
         </p:txBody>
       </p:sp>
@@ -6817,8 +4772,8 @@
         </p:nvSpPr>
         <p:spPr>
           <a:xfrm>
-            <a:off x="1005840" y="2660904"/>
-            <a:ext cx="5486400" cy="594360"/>
+            <a:off x="1005840" y="2679192"/>
+            <a:ext cx="5486400" cy="676656"/>
           </a:xfrm>
           <a:prstGeom prst="rect">
             <a:avLst/>
@@ -6837,7 +4792,7 @@
               <a:buNone/>
             </a:pPr>
             <a:r>
-              <a:rPr lang="en-US" sz="1350" dirty="0">
+              <a:rPr lang="en-US" sz="1300" dirty="0">
                 <a:solidFill>
                   <a:srgbClr val="1C2333"/>
                 </a:solidFill>
@@ -6847,7 +4802,7 @@
               </a:rPr>
               <a:t>Protsessor (CPU) qanday vazifani bajaradi?</a:t>
             </a:r>
-            <a:endParaRPr lang="en-US" sz="1350" dirty="0"/>
+            <a:endParaRPr lang="en-US" sz="1300" dirty="0"/>
           </a:p>
         </p:txBody>
       </p:sp>
@@ -6859,8 +4814,8 @@
         </p:nvSpPr>
         <p:spPr>
           <a:xfrm>
-            <a:off x="548640" y="3392424"/>
-            <a:ext cx="457200" cy="457200"/>
+            <a:off x="548640" y="3429000"/>
+            <a:ext cx="457200" cy="548640"/>
           </a:xfrm>
           <a:prstGeom prst="rect">
             <a:avLst/>
@@ -6876,7 +4831,7 @@
               <a:buNone/>
             </a:pPr>
             <a:r>
-              <a:rPr lang="en-US" sz="1500" b="1" dirty="0">
+              <a:rPr lang="en-US" sz="1400" b="1" dirty="0">
                 <a:solidFill>
                   <a:srgbClr val="1FA8C9"/>
                 </a:solidFill>
@@ -6886,7 +4841,7 @@
               </a:rPr>
               <a:t>3.</a:t>
             </a:r>
-            <a:endParaRPr lang="en-US" sz="1500" dirty="0"/>
+            <a:endParaRPr lang="en-US" sz="1400" dirty="0"/>
           </a:p>
         </p:txBody>
       </p:sp>
@@ -6898,8 +4853,8 @@
         </p:nvSpPr>
         <p:spPr>
           <a:xfrm>
-            <a:off x="1005840" y="3374136"/>
-            <a:ext cx="5486400" cy="594360"/>
+            <a:off x="1005840" y="3410712"/>
+            <a:ext cx="5486400" cy="676656"/>
           </a:xfrm>
           <a:prstGeom prst="rect">
             <a:avLst/>
@@ -6918,7 +4873,7 @@
               <a:buNone/>
             </a:pPr>
             <a:r>
-              <a:rPr lang="en-US" sz="1350" dirty="0">
+              <a:rPr lang="en-US" sz="1300" dirty="0">
                 <a:solidFill>
                   <a:srgbClr val="1C2333"/>
                 </a:solidFill>
@@ -6926,9 +4881,9 @@
                 <a:ea typeface="Calibri" pitchFamily="34" charset="-122"/>
                 <a:cs typeface="Calibri" pitchFamily="34" charset="-120"/>
               </a:rPr>
-              <a:t>RAM bilan qattiq disk orasidagi asosiy farq nima?</a:t>
-            </a:r>
-            <a:endParaRPr lang="en-US" sz="1350" dirty="0"/>
+              <a:t>RAM bilan qattiq disk orasidagi farq nima?</a:t>
+            </a:r>
+            <a:endParaRPr lang="en-US" sz="1300" dirty="0"/>
           </a:p>
         </p:txBody>
       </p:sp>
@@ -6940,8 +4895,8 @@
         </p:nvSpPr>
         <p:spPr>
           <a:xfrm>
-            <a:off x="548640" y="4105656"/>
-            <a:ext cx="457200" cy="457200"/>
+            <a:off x="548640" y="4160520"/>
+            <a:ext cx="457200" cy="548640"/>
           </a:xfrm>
           <a:prstGeom prst="rect">
             <a:avLst/>
@@ -6957,7 +4912,7 @@
               <a:buNone/>
             </a:pPr>
             <a:r>
-              <a:rPr lang="en-US" sz="1500" b="1" dirty="0">
+              <a:rPr lang="en-US" sz="1400" b="1" dirty="0">
                 <a:solidFill>
                   <a:srgbClr val="1FA8C9"/>
                 </a:solidFill>
@@ -6967,7 +4922,7 @@
               </a:rPr>
               <a:t>4.</a:t>
             </a:r>
-            <a:endParaRPr lang="en-US" sz="1500" dirty="0"/>
+            <a:endParaRPr lang="en-US" sz="1400" dirty="0"/>
           </a:p>
         </p:txBody>
       </p:sp>
@@ -6979,8 +4934,8 @@
         </p:nvSpPr>
         <p:spPr>
           <a:xfrm>
-            <a:off x="1005840" y="4087368"/>
-            <a:ext cx="5486400" cy="594360"/>
+            <a:off x="1005840" y="4142232"/>
+            <a:ext cx="5486400" cy="676656"/>
           </a:xfrm>
           <a:prstGeom prst="rect">
             <a:avLst/>
@@ -6999,7 +4954,7 @@
               <a:buNone/>
             </a:pPr>
             <a:r>
-              <a:rPr lang="en-US" sz="1350" dirty="0">
+              <a:rPr lang="en-US" sz="1300" dirty="0">
                 <a:solidFill>
                   <a:srgbClr val="1C2333"/>
                 </a:solidFill>
@@ -7009,94 +4964,13 @@
               </a:rPr>
               <a:t>Kirish va chiqish qurilmalariga 3 tadan misol keltiring.</a:t>
             </a:r>
-            <a:endParaRPr lang="en-US" sz="1350" dirty="0"/>
-          </a:p>
-        </p:txBody>
-      </p:sp>
-      <p:sp>
-        <p:nvSpPr>
-          <p:cNvPr id="14" name="Text 11"/>
-          <p:cNvSpPr/>
-          <p:nvPr/>
-        </p:nvSpPr>
-        <p:spPr>
-          <a:xfrm>
-            <a:off x="548640" y="4818888"/>
-            <a:ext cx="457200" cy="457200"/>
-          </a:xfrm>
-          <a:prstGeom prst="rect">
-            <a:avLst/>
-          </a:prstGeom>
-          <a:noFill/>
-          <a:ln/>
-        </p:spPr>
-        <p:txBody>
-          <a:bodyPr wrap="square" rtlCol="0" anchor="ctr"/>
-          <a:lstStyle/>
-          <a:p>
-            <a:pPr indent="0" marL="0">
-              <a:buNone/>
-            </a:pPr>
-            <a:r>
-              <a:rPr lang="en-US" sz="1500" b="1" dirty="0">
-                <a:solidFill>
-                  <a:srgbClr val="1FA8C9"/>
-                </a:solidFill>
-                <a:latin typeface="Cambria" pitchFamily="34" charset="0"/>
-                <a:ea typeface="Cambria" pitchFamily="34" charset="-122"/>
-                <a:cs typeface="Cambria" pitchFamily="34" charset="-120"/>
-              </a:rPr>
-              <a:t>5.</a:t>
-            </a:r>
-            <a:endParaRPr lang="en-US" sz="1500" dirty="0"/>
-          </a:p>
-        </p:txBody>
-      </p:sp>
-      <p:sp>
-        <p:nvSpPr>
-          <p:cNvPr id="15" name="Text 12"/>
-          <p:cNvSpPr/>
-          <p:nvPr/>
-        </p:nvSpPr>
-        <p:spPr>
-          <a:xfrm>
-            <a:off x="1005840" y="4800600"/>
-            <a:ext cx="5486400" cy="594360"/>
-          </a:xfrm>
-          <a:prstGeom prst="rect">
-            <a:avLst/>
-          </a:prstGeom>
-          <a:noFill/>
-          <a:ln/>
-        </p:spPr>
-        <p:txBody>
-          <a:bodyPr wrap="square" rtlCol="0" anchor="t"/>
-          <a:lstStyle/>
-          <a:p>
-            <a:pPr indent="0" marL="0">
-              <a:lnSpc>
-                <a:spcPct val="100000"/>
-              </a:lnSpc>
-              <a:buNone/>
-            </a:pPr>
-            <a:r>
-              <a:rPr lang="en-US" sz="1350" dirty="0">
-                <a:solidFill>
-                  <a:srgbClr val="1C2333"/>
-                </a:solidFill>
-                <a:latin typeface="Calibri" pitchFamily="34" charset="0"/>
-                <a:ea typeface="Calibri" pitchFamily="34" charset="-122"/>
-                <a:cs typeface="Calibri" pitchFamily="34" charset="-120"/>
-              </a:rPr>
-              <a:t>Ona plataning (motherboard) vazifasi nima?</a:t>
-            </a:r>
-            <a:endParaRPr lang="en-US" sz="1350" dirty="0"/>
-          </a:p>
-        </p:txBody>
-      </p:sp>
-      <p:sp>
-        <p:nvSpPr>
-          <p:cNvPr id="16" name="Shape 13"/>
+            <a:endParaRPr lang="en-US" sz="1300" dirty="0"/>
+          </a:p>
+        </p:txBody>
+      </p:sp>
+      <p:sp>
+        <p:nvSpPr>
+          <p:cNvPr id="14" name="Shape 11"/>
           <p:cNvSpPr/>
           <p:nvPr/>
         </p:nvSpPr>
@@ -7125,7 +4999,7 @@
       </p:sp>
       <p:pic>
         <p:nvPicPr>
-          <p:cNvPr id="17" name="Image 1" descr="preencoded.png">    </p:cNvPr>
+          <p:cNvPr id="15" name="Image 1" descr="preencoded.png">    </p:cNvPr>
           <p:cNvPicPr>
             <a:picLocks noChangeAspect="1"/>
           </p:cNvPicPr>
@@ -7149,7 +5023,7 @@
       </p:pic>
       <p:sp>
         <p:nvSpPr>
-          <p:cNvPr id="18" name="Text 14"/>
+          <p:cNvPr id="16" name="Text 12"/>
           <p:cNvSpPr/>
           <p:nvPr/>
         </p:nvSpPr>
@@ -7188,7 +5062,7 @@
       </p:sp>
       <p:sp>
         <p:nvSpPr>
-          <p:cNvPr id="19" name="Text 15"/>
+          <p:cNvPr id="17" name="Text 13"/>
           <p:cNvSpPr/>
           <p:nvPr/>
         </p:nvSpPr>
@@ -7209,12 +5083,12 @@
           <a:p>
             <a:pPr indent="0" marL="0">
               <a:lnSpc>
-                <a:spcPct val="120000"/>
+                <a:spcPct val="118000"/>
               </a:lnSpc>
               <a:buNone/>
             </a:pPr>
             <a:r>
-              <a:rPr lang="en-US" sz="1500" dirty="0">
+              <a:rPr lang="en-US" sz="1450" dirty="0">
                 <a:solidFill>
                   <a:srgbClr val="E8ECF8"/>
                 </a:solidFill>
@@ -7222,15 +5096,15 @@
                 <a:ea typeface="Calibri" pitchFamily="34" charset="-122"/>
                 <a:cs typeface="Calibri" pitchFamily="34" charset="-120"/>
               </a:rPr>
-              <a:t>O'z kompyuteringiz yoki telefoningizdagi qurilmalarni ro'yxatga oling va har birini kirish/chiqish hamda ichki/tashqi turlarga ajrating. Klaviatura yozuv tezligingizni daqiqasiga 35 belgiga yetkazishga harakat qiling.</a:t>
-            </a:r>
-            <a:endParaRPr lang="en-US" sz="1500" dirty="0"/>
+              <a:t>O'z qurilmalaringizni ro'yxatga olib, har birini kirish/chiqish va ichki/tashqi turlarga ajrating; klaviatura tezligini 35 belgiga yetkazishga harakat qiling.</a:t>
+            </a:r>
+            <a:endParaRPr lang="en-US" sz="1450" dirty="0"/>
           </a:p>
         </p:txBody>
       </p:sp>
       <p:pic>
         <p:nvPicPr>
-          <p:cNvPr id="20" name="Image 2" descr="/sessions/ecstatic-admiring-tesla/mnt/outputs/assets/logo.png">    </p:cNvPr>
+          <p:cNvPr id="18" name="Image 2" descr="/sessions/ecstatic-admiring-tesla/mnt/outputs/assets/logo.png">    </p:cNvPr>
           <p:cNvPicPr>
             <a:picLocks noChangeAspect="1"/>
           </p:cNvPicPr>
@@ -7254,7 +5128,7 @@
       </p:pic>
       <p:sp>
         <p:nvSpPr>
-          <p:cNvPr id="21" name="Text 16"/>
+          <p:cNvPr id="19" name="Text 14"/>
           <p:cNvSpPr/>
           <p:nvPr/>
         </p:nvSpPr>
@@ -7293,14 +5167,14 @@
       </p:sp>
       <p:sp>
         <p:nvSpPr>
-          <p:cNvPr id="22" name="Text 17"/>
-          <p:cNvSpPr/>
-          <p:nvPr/>
-        </p:nvSpPr>
-        <p:spPr>
-          <a:xfrm>
-            <a:off x="9997135" y="6327648"/>
-            <a:ext cx="1737360" cy="365760"/>
+          <p:cNvPr id="20" name="Text 15"/>
+          <p:cNvSpPr/>
+          <p:nvPr/>
+        </p:nvSpPr>
+        <p:spPr>
+          <a:xfrm>
+            <a:off x="9814255" y="6327648"/>
+            <a:ext cx="1920240" cy="365760"/>
           </a:xfrm>
           <a:prstGeom prst="rect">
             <a:avLst/>
